--- a/Planning docs/Slides/lesson-32-3-teacher-slides.pptx
+++ b/Planning docs/Slides/lesson-32-3-teacher-slides.pptx
@@ -513,7 +513,7 @@
           <a:p>
             <a:r>
               <a:rPr lang="en-US" dirty="0"/>
-              <a:t>Title slide for Week 32 Day 3. Extension Unit.</a:t>
+              <a:t>Lesson 32.3. Reading: Reading: Week 32.</a:t>
             </a:r>
             <a:endParaRPr lang="en-US" dirty="0"/>
           </a:p>
@@ -601,7 +601,7 @@
           <a:p>
             <a:r>
               <a:rPr lang="en-US" dirty="0"/>
-              <a:t>Review morphology focus. Have students identify the base word and affix in each example.</a:t>
+              <a:t>Break the word into base + word part. Ask what the part adds to the meaning.</a:t>
             </a:r>
             <a:endParaRPr lang="en-US" dirty="0"/>
           </a:p>
@@ -689,7 +689,7 @@
           <a:p>
             <a:r>
               <a:rPr lang="en-US" dirty="0"/>
-              <a:t>Reading focus slide. Use pause-and-think questions during reading. Copywork can be done after reading.</a:t>
+              <a:t>Each word appears in the chapters read this week, in the author’s own sentence.</a:t>
             </a:r>
             <a:endParaRPr lang="en-US" dirty="0"/>
           </a:p>
@@ -777,7 +777,7 @@
           <a:p>
             <a:r>
               <a:rPr lang="en-US" dirty="0"/>
-              <a:t>Transition to the writing workshop assignment in Canvas.</a:t>
+              <a:t>Read the chapters, then return to the pause questions.</a:t>
             </a:r>
             <a:endParaRPr lang="en-US" dirty="0"/>
           </a:p>
@@ -865,7 +865,7 @@
           <a:p>
             <a:r>
               <a:rPr lang="en-US" dirty="0"/>
-              <a:t>Read the prompt aloud once. Give students about 1 minute to read it again silently and think. Remind them: there is no wrong answer — just write what comes to mind. Advance to the writing slide when ready.</a:t>
+              <a:t>Read the prompt aloud. Give students a moment to think before writing.</a:t>
             </a:r>
             <a:endParaRPr lang="en-US" dirty="0"/>
           </a:p>
@@ -953,7 +953,7 @@
           <a:p>
             <a:r>
               <a:rPr lang="en-US" dirty="0"/>
-              <a:t>Set a 5-minute timer. Walk the room quietly. If a student stops, gently encourage them: "Keep writing — even one more sentence." The goal is sustained writing, not perfection. Do not interrupt to correct spelling or grammar during this time.</a:t>
+              <a:t>Five minutes of sustained writing. Stamina over polish. Do not correct spelling now.</a:t>
             </a:r>
             <a:endParaRPr lang="en-US" dirty="0"/>
           </a:p>
@@ -1041,7 +1041,7 @@
           <a:p>
             <a:r>
               <a:rPr lang="en-US" dirty="0"/>
-              <a:t>Set a 1-minute timer. Remind students: we are only fixing ONE thing today — Did I give reasons for my choice, not just pick one?. They should also do a quick conventions check (capitals, punctuation, spelling). They do NOT need to rewrite — just fix and improve. Revision = improving ideas; Editing = fixing conventions. Keep them separate in your language.</a:t>
+              <a:t>One fix only. Editing is conventions; revision is ideas. Name which one you are asking for.</a:t>
             </a:r>
             <a:endParaRPr lang="en-US" dirty="0"/>
           </a:p>
@@ -1129,7 +1129,7 @@
           <a:p>
             <a:r>
               <a:rPr lang="en-US" dirty="0"/>
-              <a:t>Call on 3-5 students to share. Respond with genuine interest: "I love how you described that" or "That's a really interesting idea." Avoid correcting grammar or spelling during share time — this is about celebrating writing. If time is short, have 2-3 students share in chat instead.</a:t>
+              <a:t>Two or three volunteers. Praise something specific in each.</a:t>
             </a:r>
             <a:endParaRPr lang="en-US" dirty="0"/>
           </a:p>
@@ -1217,7 +1217,7 @@
           <a:p>
             <a:r>
               <a:rPr lang="en-US" dirty="0"/>
-              <a:t>Review the big question and reading lens with students before reading.</a:t>
+              <a:t>Reading lens: Good readers in a fantasy story slow down and pay attention to how the author builds the world . Details of setting, character, and pattern all work together to create meaning.</a:t>
             </a:r>
             <a:endParaRPr lang="en-US" dirty="0"/>
           </a:p>
@@ -1305,7 +1305,8 @@
           <a:p>
             <a:r>
               <a:rPr lang="en-US" dirty="0"/>
-              <a:t>Review each grammar point with students. These are the key patterns to notice before fixing the next sentence.</a:t>
+              <a:t>Model sentence in the lesson: greatest novels — chosen, tested, and built time.
+Tap through each highlighted word in the lesson and name what it does right before moving to the fix-it.</a:t>
             </a:r>
             <a:endParaRPr lang="en-US" dirty="0"/>
           </a:p>
@@ -1393,7 +1394,8 @@
           <a:p>
             <a:r>
               <a:rPr lang="en-US" dirty="0"/>
-              <a:t>Give students 1-2 minutes to fix the sentence. Walk the room and check.</a:t>
+              <a:t>Corrected: Corrected: By the end of their stories, each character we read about had grown in ways that surprised even themselves. 
+Look for: By the end of their stories begins the prepositional phrase used as an opener; comma after stories; had grown = past perfect verb (consistent with the past narrative); period ends.</a:t>
             </a:r>
             <a:endParaRPr lang="en-US" dirty="0"/>
           </a:p>
@@ -1481,7 +1483,8 @@
           <a:p>
             <a:r>
               <a:rPr lang="en-US" dirty="0"/>
-              <a:t>Reveal the corrected version. Point out each fix: capitalization, punctuation, spelling.</a:t>
+              <a:t>Corrected: Corrected: By the end of their stories, each character we read about had grown in ways that surprised even themselves. 
+Look for: By the end of their stories begins the prepositional phrase used as an opener; comma after stories; had grown = past perfect verb (consistent with the past narrative); period ends.</a:t>
             </a:r>
             <a:endParaRPr lang="en-US" dirty="0"/>
           </a:p>
@@ -1836,7 +1839,7 @@
     <p:bg>
       <p:bgPr>
         <a:solidFill>
-          <a:srgbClr val="2C3E50"/>
+          <a:srgbClr val="0E1C42"/>
         </a:solidFill>
       </p:bgPr>
     </p:bg>
@@ -1862,8 +1865,8 @@
         </p:nvSpPr>
         <p:spPr>
           <a:xfrm>
-            <a:off x="457200" y="914400"/>
-            <a:ext cx="8229600" cy="1097280"/>
+            <a:off x="0" y="822960"/>
+            <a:ext cx="9144000" cy="822960"/>
           </a:xfrm>
           <a:prstGeom prst="rect">
             <a:avLst/>
@@ -1879,7 +1882,43 @@
               <a:buNone/>
             </a:pPr>
             <a:r>
-              <a:rPr lang="en-US" sz="4000" b="1" dirty="0">
+              <a:rPr lang="en-US" sz="5200" dirty="0">
+                <a:solidFill>
+                  <a:srgbClr val="000000"/>
+                </a:solidFill>
+              </a:rPr>
+              <a:t>🎉</a:t>
+            </a:r>
+            <a:endParaRPr lang="en-US" sz="5200" dirty="0"/>
+          </a:p>
+        </p:txBody>
+      </p:sp>
+      <p:sp>
+        <p:nvSpPr>
+          <p:cNvPr id="3" name="Text 1"/>
+          <p:cNvSpPr/>
+          <p:nvPr/>
+        </p:nvSpPr>
+        <p:spPr>
+          <a:xfrm>
+            <a:off x="457200" y="1691640"/>
+            <a:ext cx="8229600" cy="566928"/>
+          </a:xfrm>
+          <a:prstGeom prst="rect">
+            <a:avLst/>
+          </a:prstGeom>
+          <a:noFill/>
+          <a:ln/>
+        </p:spPr>
+        <p:txBody>
+          <a:bodyPr wrap="square" lIns="0" tIns="0" rIns="0" bIns="0" rtlCol="0" anchor="ctr"/>
+          <a:lstStyle/>
+          <a:p>
+            <a:pPr algn="ctr" indent="0" marL="0">
+              <a:buNone/>
+            </a:pPr>
+            <a:r>
+              <a:rPr lang="en-US" sz="3400" b="1" dirty="0">
                 <a:solidFill>
                   <a:srgbClr val="FFFFFF"/>
                 </a:solidFill>
@@ -1887,22 +1926,22 @@
                 <a:ea typeface="Calibri" pitchFamily="34" charset="-122"/>
                 <a:cs typeface="Calibri" pitchFamily="34" charset="-120"/>
               </a:rPr>
-              <a:t>🌟  Week 32 · Day 3</a:t>
-            </a:r>
-            <a:endParaRPr lang="en-US" sz="4000" dirty="0"/>
-          </a:p>
-        </p:txBody>
-      </p:sp>
-      <p:sp>
-        <p:nvSpPr>
-          <p:cNvPr id="3" name="Text 1"/>
-          <p:cNvSpPr/>
-          <p:nvPr/>
-        </p:nvSpPr>
-        <p:spPr>
-          <a:xfrm>
-            <a:off x="457200" y="2103120"/>
-            <a:ext cx="8229600" cy="731520"/>
+              <a:t>Year-End Synthesis</a:t>
+            </a:r>
+            <a:endParaRPr lang="en-US" sz="3400" dirty="0"/>
+          </a:p>
+        </p:txBody>
+      </p:sp>
+      <p:sp>
+        <p:nvSpPr>
+          <p:cNvPr id="4" name="Text 2"/>
+          <p:cNvSpPr/>
+          <p:nvPr/>
+        </p:nvSpPr>
+        <p:spPr>
+          <a:xfrm>
+            <a:off x="457200" y="2331720"/>
+            <a:ext cx="8229600" cy="411480"/>
           </a:xfrm>
           <a:prstGeom prst="rect">
             <a:avLst/>
@@ -1918,30 +1957,30 @@
               <a:buNone/>
             </a:pPr>
             <a:r>
-              <a:rPr lang="en-US" sz="1800" dirty="0">
-                <a:solidFill>
-                  <a:srgbClr val="E67E22"/>
-                </a:solidFill>
-                <a:latin typeface="Calibri" pitchFamily="34" charset="0"/>
-                <a:ea typeface="Calibri" pitchFamily="34" charset="-122"/>
-                <a:cs typeface="Calibri" pitchFamily="34" charset="-120"/>
-              </a:rPr>
-              <a:t>Extension Unit — Lesson 32.3</a:t>
-            </a:r>
-            <a:endParaRPr lang="en-US" sz="1800" dirty="0"/>
-          </a:p>
-        </p:txBody>
-      </p:sp>
-      <p:sp>
-        <p:nvSpPr>
-          <p:cNvPr id="4" name="Text 2"/>
-          <p:cNvSpPr/>
-          <p:nvPr/>
-        </p:nvSpPr>
-        <p:spPr>
-          <a:xfrm>
-            <a:off x="457200" y="4114800"/>
-            <a:ext cx="8229600" cy="457200"/>
+              <a:rPr lang="en-US" sz="2000" dirty="0">
+                <a:solidFill>
+                  <a:srgbClr val="34B76F"/>
+                </a:solidFill>
+                <a:latin typeface="Calibri" pitchFamily="34" charset="0"/>
+                <a:ea typeface="Calibri" pitchFamily="34" charset="-122"/>
+                <a:cs typeface="Calibri" pitchFamily="34" charset="-120"/>
+              </a:rPr>
+              <a:t>Lesson 32.3  ·  Reading: Week 32</a:t>
+            </a:r>
+            <a:endParaRPr lang="en-US" sz="2000" dirty="0"/>
+          </a:p>
+        </p:txBody>
+      </p:sp>
+      <p:sp>
+        <p:nvSpPr>
+          <p:cNvPr id="5" name="Text 3"/>
+          <p:cNvSpPr/>
+          <p:nvPr/>
+        </p:nvSpPr>
+        <p:spPr>
+          <a:xfrm>
+            <a:off x="457200" y="2880360"/>
+            <a:ext cx="8229600" cy="320040"/>
           </a:xfrm>
           <a:prstGeom prst="rect">
             <a:avLst/>
@@ -1957,17 +1996,17 @@
               <a:buNone/>
             </a:pPr>
             <a:r>
-              <a:rPr lang="en-US" sz="1300" dirty="0">
-                <a:solidFill>
-                  <a:srgbClr val="AAAAAA"/>
-                </a:solidFill>
-                <a:latin typeface="Calibri" pitchFamily="34" charset="0"/>
-                <a:ea typeface="Calibri" pitchFamily="34" charset="-122"/>
-                <a:cs typeface="Calibri" pitchFamily="34" charset="-120"/>
-              </a:rPr>
-              <a:t>Optima Academy Online · 3rd Grade ELA</a:t>
-            </a:r>
-            <a:endParaRPr lang="en-US" sz="1300" dirty="0"/>
+              <a:rPr lang="en-US" sz="1400" dirty="0">
+                <a:solidFill>
+                  <a:srgbClr val="C9BCE4"/>
+                </a:solidFill>
+                <a:latin typeface="Calibri" pitchFamily="34" charset="0"/>
+                <a:ea typeface="Calibri" pitchFamily="34" charset="-122"/>
+                <a:cs typeface="Calibri" pitchFamily="34" charset="-120"/>
+              </a:rPr>
+              <a:t>Grade 3 ELA  ·  Virtue: Gratitude</a:t>
+            </a:r>
+            <a:endParaRPr lang="en-US" sz="1400" dirty="0"/>
           </a:p>
         </p:txBody>
       </p:sp>
@@ -2005,14 +2044,34 @@
       </p:grpSpPr>
       <p:sp>
         <p:nvSpPr>
-          <p:cNvPr id="2" name="Text 0"/>
-          <p:cNvSpPr/>
-          <p:nvPr/>
-        </p:nvSpPr>
-        <p:spPr>
-          <a:xfrm>
-            <a:off x="365760" y="164592"/>
-            <a:ext cx="8412480" cy="566928"/>
+          <p:cNvPr id="2" name="Shape 0"/>
+          <p:cNvSpPr/>
+          <p:nvPr/>
+        </p:nvSpPr>
+        <p:spPr>
+          <a:xfrm>
+            <a:off x="0" y="0"/>
+            <a:ext cx="9144000" cy="566928"/>
+          </a:xfrm>
+          <a:prstGeom prst="rect">
+            <a:avLst/>
+          </a:prstGeom>
+          <a:solidFill>
+            <a:srgbClr val="34B76F"/>
+          </a:solidFill>
+          <a:ln/>
+        </p:spPr>
+      </p:sp>
+      <p:sp>
+        <p:nvSpPr>
+          <p:cNvPr id="3" name="Text 1"/>
+          <p:cNvSpPr/>
+          <p:nvPr/>
+        </p:nvSpPr>
+        <p:spPr>
+          <a:xfrm>
+            <a:off x="365760" y="54864"/>
+            <a:ext cx="8412480" cy="457200"/>
           </a:xfrm>
           <a:prstGeom prst="rect">
             <a:avLst/>
@@ -2024,46 +2083,23 @@
           <a:bodyPr wrap="square" lIns="0" tIns="0" rIns="0" bIns="0" rtlCol="0" anchor="ctr"/>
           <a:lstStyle/>
           <a:p>
-            <a:pPr algn="l" indent="0" marL="0">
-              <a:buNone/>
-            </a:pPr>
-            <a:r>
-              <a:rPr lang="en-US" sz="2800" b="1" dirty="0">
-                <a:solidFill>
-                  <a:srgbClr val="0E1C42"/>
-                </a:solidFill>
-                <a:latin typeface="Calibri" pitchFamily="34" charset="0"/>
-                <a:ea typeface="Calibri" pitchFamily="34" charset="-122"/>
-                <a:cs typeface="Calibri" pitchFamily="34" charset="-120"/>
-              </a:rPr>
-              <a:t>🌱 Morphology: Morphology reflection: word parts I know</a:t>
-            </a:r>
-            <a:endParaRPr lang="en-US" sz="2800" dirty="0"/>
-          </a:p>
-        </p:txBody>
-      </p:sp>
-      <p:sp>
-        <p:nvSpPr>
-          <p:cNvPr id="3" name="Shape 1"/>
-          <p:cNvSpPr/>
-          <p:nvPr/>
-        </p:nvSpPr>
-        <p:spPr>
-          <a:xfrm>
-            <a:off x="365760" y="749808"/>
-            <a:ext cx="8412480" cy="0"/>
-          </a:xfrm>
-          <a:prstGeom prst="line">
-            <a:avLst/>
-          </a:prstGeom>
-          <a:noFill/>
-          <a:ln w="19050">
-            <a:solidFill>
-              <a:srgbClr val="8B6FC0"/>
-            </a:solidFill>
-            <a:prstDash val="solid"/>
-          </a:ln>
-        </p:spPr>
+            <a:pPr indent="0" marL="0">
+              <a:buNone/>
+            </a:pPr>
+            <a:r>
+              <a:rPr lang="en-US" sz="2200" b="1" dirty="0">
+                <a:solidFill>
+                  <a:srgbClr val="FFFFFF"/>
+                </a:solidFill>
+                <a:latin typeface="Calibri" pitchFamily="34" charset="0"/>
+                <a:ea typeface="Calibri" pitchFamily="34" charset="-122"/>
+                <a:cs typeface="Calibri" pitchFamily="34" charset="-120"/>
+              </a:rPr>
+              <a:t>🌱  Morphology</a:t>
+            </a:r>
+            <a:endParaRPr lang="en-US" sz="2200" dirty="0"/>
+          </a:p>
+        </p:txBody>
       </p:sp>
       <p:sp>
         <p:nvSpPr>
@@ -2073,8 +2109,8 @@
         </p:nvSpPr>
         <p:spPr>
           <a:xfrm>
-            <a:off x="457200" y="1005840"/>
-            <a:ext cx="8046720" cy="292608"/>
+            <a:off x="365760" y="804672"/>
+            <a:ext cx="8229600" cy="237744"/>
           </a:xfrm>
           <a:prstGeom prst="rect">
             <a:avLst/>
@@ -2090,15 +2126,15 @@
               <a:buNone/>
             </a:pPr>
             <a:r>
-              <a:rPr lang="en-US" sz="1100" b="1" spc="200" kern="0" dirty="0">
-                <a:solidFill>
-                  <a:srgbClr val="64748B"/>
-                </a:solidFill>
-                <a:latin typeface="Calibri" pitchFamily="34" charset="0"/>
-                <a:ea typeface="Calibri" pitchFamily="34" charset="-122"/>
-                <a:cs typeface="Calibri" pitchFamily="34" charset="-120"/>
-              </a:rPr>
-              <a:t>CONCEPT EXAMPLES</a:t>
+              <a:rPr lang="en-US" sz="1100" b="1" spc="100" kern="0" dirty="0">
+                <a:solidFill>
+                  <a:srgbClr val="8B6FC0"/>
+                </a:solidFill>
+                <a:latin typeface="Calibri" pitchFamily="34" charset="0"/>
+                <a:ea typeface="Calibri" pitchFamily="34" charset="-122"/>
+                <a:cs typeface="Calibri" pitchFamily="34" charset="-120"/>
+              </a:rPr>
+              <a:t>MORPHOLOGY REFLECTION: WORD PARTS I KNOW</a:t>
             </a:r>
             <a:endParaRPr lang="en-US" sz="1100" dirty="0"/>
           </a:p>
@@ -2106,14 +2142,43 @@
       </p:sp>
       <p:sp>
         <p:nvSpPr>
-          <p:cNvPr id="5" name="Text 3"/>
-          <p:cNvSpPr/>
-          <p:nvPr/>
-        </p:nvSpPr>
-        <p:spPr>
-          <a:xfrm>
-            <a:off x="640080" y="1325880"/>
-            <a:ext cx="7863840" cy="320040"/>
+          <p:cNvPr id="5" name="Shape 3"/>
+          <p:cNvSpPr/>
+          <p:nvPr/>
+        </p:nvSpPr>
+        <p:spPr>
+          <a:xfrm>
+            <a:off x="365760" y="1097280"/>
+            <a:ext cx="8412480" cy="621792"/>
+          </a:xfrm>
+          <a:prstGeom prst="roundRect">
+            <a:avLst>
+              <a:gd name="adj" fmla="val 14706"/>
+            </a:avLst>
+          </a:prstGeom>
+          <a:solidFill>
+            <a:srgbClr val="F0E8FF"/>
+          </a:solidFill>
+          <a:ln/>
+          <a:effectLst>
+            <a:outerShdw sx="100000" sy="100000" kx="0" ky="0" algn="bl" rotWithShape="0" blurRad="101600" dist="38100" dir="2700000">
+              <a:srgbClr val="000000">
+                <a:alpha val="12000"/>
+              </a:srgbClr>
+            </a:outerShdw>
+          </a:effectLst>
+        </p:spPr>
+      </p:sp>
+      <p:sp>
+        <p:nvSpPr>
+          <p:cNvPr id="6" name="Text 4"/>
+          <p:cNvSpPr/>
+          <p:nvPr/>
+        </p:nvSpPr>
+        <p:spPr>
+          <a:xfrm>
+            <a:off x="594360" y="1216152"/>
+            <a:ext cx="7863840" cy="384048"/>
           </a:xfrm>
           <a:prstGeom prst="rect">
             <a:avLst/>
@@ -2129,7 +2194,7 @@
               <a:buNone/>
             </a:pPr>
             <a:r>
-              <a:rPr lang="en-US" sz="1300" dirty="0">
+              <a:rPr lang="en-US" sz="1500" dirty="0">
                 <a:solidFill>
                   <a:srgbClr val="1E293B"/>
                 </a:solidFill>
@@ -2137,9 +2202,9 @@
                 <a:ea typeface="Calibri" pitchFamily="34" charset="-122"/>
                 <a:cs typeface="Calibri" pitchFamily="34" charset="-120"/>
               </a:rPr>
-              <a:t>• 📌 Apply: Build words using Year Review</a:t>
-            </a:r>
-            <a:endParaRPr lang="en-US" sz="1300" dirty="0"/>
+              <a:t>🌱  Match each clue to the correct word that uses this week's word part.</a:t>
+            </a:r>
+            <a:endParaRPr lang="en-US" sz="1500" dirty="0"/>
           </a:p>
         </p:txBody>
       </p:sp>
@@ -2177,14 +2242,34 @@
       </p:grpSpPr>
       <p:sp>
         <p:nvSpPr>
-          <p:cNvPr id="2" name="Text 0"/>
-          <p:cNvSpPr/>
-          <p:nvPr/>
-        </p:nvSpPr>
-        <p:spPr>
-          <a:xfrm>
-            <a:off x="365760" y="164592"/>
-            <a:ext cx="8412480" cy="566928"/>
+          <p:cNvPr id="2" name="Shape 0"/>
+          <p:cNvSpPr/>
+          <p:nvPr/>
+        </p:nvSpPr>
+        <p:spPr>
+          <a:xfrm>
+            <a:off x="0" y="0"/>
+            <a:ext cx="9144000" cy="566928"/>
+          </a:xfrm>
+          <a:prstGeom prst="rect">
+            <a:avLst/>
+          </a:prstGeom>
+          <a:solidFill>
+            <a:srgbClr val="55C8E8"/>
+          </a:solidFill>
+          <a:ln/>
+        </p:spPr>
+      </p:sp>
+      <p:sp>
+        <p:nvSpPr>
+          <p:cNvPr id="3" name="Text 1"/>
+          <p:cNvSpPr/>
+          <p:nvPr/>
+        </p:nvSpPr>
+        <p:spPr>
+          <a:xfrm>
+            <a:off x="365760" y="54864"/>
+            <a:ext cx="8412480" cy="457200"/>
           </a:xfrm>
           <a:prstGeom prst="rect">
             <a:avLst/>
@@ -2196,11 +2281,118 @@
           <a:bodyPr wrap="square" lIns="0" tIns="0" rIns="0" bIns="0" rtlCol="0" anchor="ctr"/>
           <a:lstStyle/>
           <a:p>
-            <a:pPr algn="l" indent="0" marL="0">
-              <a:buNone/>
-            </a:pPr>
-            <a:r>
-              <a:rPr lang="en-US" sz="2800" b="1" dirty="0">
+            <a:pPr indent="0" marL="0">
+              <a:buNone/>
+            </a:pPr>
+            <a:r>
+              <a:rPr lang="en-US" sz="2200" b="1" dirty="0">
+                <a:solidFill>
+                  <a:srgbClr val="FFFFFF"/>
+                </a:solidFill>
+                <a:latin typeface="Calibri" pitchFamily="34" charset="0"/>
+                <a:ea typeface="Calibri" pitchFamily="34" charset="-122"/>
+                <a:cs typeface="Calibri" pitchFamily="34" charset="-120"/>
+              </a:rPr>
+              <a:t>🔤  Vocabulary</a:t>
+            </a:r>
+            <a:endParaRPr lang="en-US" sz="2200" dirty="0"/>
+          </a:p>
+        </p:txBody>
+      </p:sp>
+      <p:sp>
+        <p:nvSpPr>
+          <p:cNvPr id="4" name="Text 2"/>
+          <p:cNvSpPr/>
+          <p:nvPr/>
+        </p:nvSpPr>
+        <p:spPr>
+          <a:xfrm>
+            <a:off x="365760" y="804672"/>
+            <a:ext cx="8229600" cy="237744"/>
+          </a:xfrm>
+          <a:prstGeom prst="rect">
+            <a:avLst/>
+          </a:prstGeom>
+          <a:noFill/>
+          <a:ln/>
+        </p:spPr>
+        <p:txBody>
+          <a:bodyPr wrap="square" lIns="0" tIns="0" rIns="0" bIns="0" rtlCol="0" anchor="ctr"/>
+          <a:lstStyle/>
+          <a:p>
+            <a:pPr indent="0" marL="0">
+              <a:buNone/>
+            </a:pPr>
+            <a:r>
+              <a:rPr lang="en-US" sz="1100" b="1" spc="100" kern="0" dirty="0">
+                <a:solidFill>
+                  <a:srgbClr val="55C8E8"/>
+                </a:solidFill>
+                <a:latin typeface="Calibri" pitchFamily="34" charset="0"/>
+                <a:ea typeface="Calibri" pitchFamily="34" charset="-122"/>
+                <a:cs typeface="Calibri" pitchFamily="34" charset="-120"/>
+              </a:rPr>
+              <a:t>USE THE WORDS</a:t>
+            </a:r>
+            <a:endParaRPr lang="en-US" sz="1100" dirty="0"/>
+          </a:p>
+        </p:txBody>
+      </p:sp>
+      <p:sp>
+        <p:nvSpPr>
+          <p:cNvPr id="5" name="Shape 3"/>
+          <p:cNvSpPr/>
+          <p:nvPr/>
+        </p:nvSpPr>
+        <p:spPr>
+          <a:xfrm>
+            <a:off x="365760" y="1097280"/>
+            <a:ext cx="8412480" cy="658368"/>
+          </a:xfrm>
+          <a:prstGeom prst="roundRect">
+            <a:avLst>
+              <a:gd name="adj" fmla="val 13889"/>
+            </a:avLst>
+          </a:prstGeom>
+          <a:solidFill>
+            <a:srgbClr val="E5F7FC"/>
+          </a:solidFill>
+          <a:ln/>
+          <a:effectLst>
+            <a:outerShdw sx="100000" sy="100000" kx="0" ky="0" algn="bl" rotWithShape="0" blurRad="101600" dist="38100" dir="2700000">
+              <a:srgbClr val="000000">
+                <a:alpha val="12000"/>
+              </a:srgbClr>
+            </a:outerShdw>
+          </a:effectLst>
+        </p:spPr>
+      </p:sp>
+      <p:sp>
+        <p:nvSpPr>
+          <p:cNvPr id="6" name="Text 4"/>
+          <p:cNvSpPr/>
+          <p:nvPr/>
+        </p:nvSpPr>
+        <p:spPr>
+          <a:xfrm>
+            <a:off x="594360" y="1225296"/>
+            <a:ext cx="7863840" cy="420624"/>
+          </a:xfrm>
+          <a:prstGeom prst="rect">
+            <a:avLst/>
+          </a:prstGeom>
+          <a:noFill/>
+          <a:ln/>
+        </p:spPr>
+        <p:txBody>
+          <a:bodyPr wrap="square" lIns="0" tIns="0" rIns="0" bIns="0" rtlCol="0" anchor="ctr"/>
+          <a:lstStyle/>
+          <a:p>
+            <a:pPr indent="0" marL="0">
+              <a:buNone/>
+            </a:pPr>
+            <a:r>
+              <a:rPr lang="en-US" sz="1700" b="1" dirty="0">
                 <a:solidFill>
                   <a:srgbClr val="0E1C42"/>
                 </a:solidFill>
@@ -2208,45 +2400,65 @@
                 <a:ea typeface="Calibri" pitchFamily="34" charset="-122"/>
                 <a:cs typeface="Calibri" pitchFamily="34" charset="-120"/>
               </a:rPr>
-              <a:t>Reading: Week 32</a:t>
-            </a:r>
-            <a:endParaRPr lang="en-US" sz="2800" dirty="0"/>
-          </a:p>
-        </p:txBody>
-      </p:sp>
-      <p:sp>
-        <p:nvSpPr>
-          <p:cNvPr id="3" name="Shape 1"/>
-          <p:cNvSpPr/>
-          <p:nvPr/>
-        </p:nvSpPr>
-        <p:spPr>
-          <a:xfrm>
-            <a:off x="365760" y="749808"/>
-            <a:ext cx="8412480" cy="0"/>
-          </a:xfrm>
-          <a:prstGeom prst="line">
-            <a:avLst/>
-          </a:prstGeom>
-          <a:noFill/>
-          <a:ln w="19050">
-            <a:solidFill>
-              <a:srgbClr val="55C8E8"/>
-            </a:solidFill>
-            <a:prstDash val="solid"/>
-          </a:ln>
-        </p:spPr>
-      </p:sp>
-      <p:sp>
-        <p:nvSpPr>
-          <p:cNvPr id="4" name="Text 2"/>
-          <p:cNvSpPr/>
-          <p:nvPr/>
-        </p:nvSpPr>
-        <p:spPr>
-          <a:xfrm>
-            <a:off x="457200" y="1005840"/>
-            <a:ext cx="8046720" cy="292608"/>
+              <a:t>empathy  </a:t>
+            </a:r>
+            <a:pPr indent="0" marL="0">
+              <a:buNone/>
+            </a:pPr>
+            <a:r>
+              <a:rPr lang="en-US" sz="1400" dirty="0">
+                <a:solidFill>
+                  <a:srgbClr val="1E293B"/>
+                </a:solidFill>
+                <a:latin typeface="Calibri" pitchFamily="34" charset="0"/>
+                <a:ea typeface="Calibri" pitchFamily="34" charset="-122"/>
+                <a:cs typeface="Calibri" pitchFamily="34" charset="-120"/>
+              </a:rPr>
+              <a:t>Despereaux showed ______ — he understood the princess's sadness as if it were his own.</a:t>
+            </a:r>
+            <a:endParaRPr lang="en-US" sz="1700" dirty="0"/>
+          </a:p>
+        </p:txBody>
+      </p:sp>
+      <p:sp>
+        <p:nvSpPr>
+          <p:cNvPr id="7" name="Shape 5"/>
+          <p:cNvSpPr/>
+          <p:nvPr/>
+        </p:nvSpPr>
+        <p:spPr>
+          <a:xfrm>
+            <a:off x="365760" y="1828800"/>
+            <a:ext cx="8412480" cy="658368"/>
+          </a:xfrm>
+          <a:prstGeom prst="roundRect">
+            <a:avLst>
+              <a:gd name="adj" fmla="val 13889"/>
+            </a:avLst>
+          </a:prstGeom>
+          <a:solidFill>
+            <a:srgbClr val="FFFFFF"/>
+          </a:solidFill>
+          <a:ln/>
+          <a:effectLst>
+            <a:outerShdw sx="100000" sy="100000" kx="0" ky="0" algn="bl" rotWithShape="0" blurRad="101600" dist="38100" dir="2700000">
+              <a:srgbClr val="000000">
+                <a:alpha val="12000"/>
+              </a:srgbClr>
+            </a:outerShdw>
+          </a:effectLst>
+        </p:spPr>
+      </p:sp>
+      <p:sp>
+        <p:nvSpPr>
+          <p:cNvPr id="8" name="Text 6"/>
+          <p:cNvSpPr/>
+          <p:nvPr/>
+        </p:nvSpPr>
+        <p:spPr>
+          <a:xfrm>
+            <a:off x="594360" y="1956816"/>
+            <a:ext cx="7863840" cy="420624"/>
           </a:xfrm>
           <a:prstGeom prst="rect">
             <a:avLst/>
@@ -2262,30 +2474,73 @@
               <a:buNone/>
             </a:pPr>
             <a:r>
-              <a:rPr lang="en-US" sz="1100" b="1" spc="200" kern="0" dirty="0">
-                <a:solidFill>
-                  <a:srgbClr val="55C8E8"/>
-                </a:solidFill>
-                <a:latin typeface="Calibri" pitchFamily="34" charset="0"/>
-                <a:ea typeface="Calibri" pitchFamily="34" charset="-122"/>
-                <a:cs typeface="Calibri" pitchFamily="34" charset="-120"/>
-              </a:rPr>
-              <a:t>PAUSE &amp; THINK</a:t>
-            </a:r>
-            <a:endParaRPr lang="en-US" sz="1100" dirty="0"/>
-          </a:p>
-        </p:txBody>
-      </p:sp>
-      <p:sp>
-        <p:nvSpPr>
-          <p:cNvPr id="5" name="Text 3"/>
-          <p:cNvSpPr/>
-          <p:nvPr/>
-        </p:nvSpPr>
-        <p:spPr>
-          <a:xfrm>
-            <a:off x="640080" y="1325880"/>
-            <a:ext cx="7863840" cy="548640"/>
+              <a:rPr lang="en-US" sz="1700" b="1" dirty="0">
+                <a:solidFill>
+                  <a:srgbClr val="0E1C42"/>
+                </a:solidFill>
+                <a:latin typeface="Calibri" pitchFamily="34" charset="0"/>
+                <a:ea typeface="Calibri" pitchFamily="34" charset="-122"/>
+                <a:cs typeface="Calibri" pitchFamily="34" charset="-120"/>
+              </a:rPr>
+              <a:t>resilience  </a:t>
+            </a:r>
+            <a:pPr indent="0" marL="0">
+              <a:buNone/>
+            </a:pPr>
+            <a:r>
+              <a:rPr lang="en-US" sz="1400" dirty="0">
+                <a:solidFill>
+                  <a:srgbClr val="1E293B"/>
+                </a:solidFill>
+                <a:latin typeface="Calibri" pitchFamily="34" charset="0"/>
+                <a:ea typeface="Calibri" pitchFamily="34" charset="-122"/>
+                <a:cs typeface="Calibri" pitchFamily="34" charset="-120"/>
+              </a:rPr>
+              <a:t>Jemmy displayed remarkable ______ — no matter how many times things went wrong, he kept going.</a:t>
+            </a:r>
+            <a:endParaRPr lang="en-US" sz="1700" dirty="0"/>
+          </a:p>
+        </p:txBody>
+      </p:sp>
+      <p:sp>
+        <p:nvSpPr>
+          <p:cNvPr id="9" name="Shape 7"/>
+          <p:cNvSpPr/>
+          <p:nvPr/>
+        </p:nvSpPr>
+        <p:spPr>
+          <a:xfrm>
+            <a:off x="365760" y="2560320"/>
+            <a:ext cx="8412480" cy="658368"/>
+          </a:xfrm>
+          <a:prstGeom prst="roundRect">
+            <a:avLst>
+              <a:gd name="adj" fmla="val 13889"/>
+            </a:avLst>
+          </a:prstGeom>
+          <a:solidFill>
+            <a:srgbClr val="E5F7FC"/>
+          </a:solidFill>
+          <a:ln/>
+          <a:effectLst>
+            <a:outerShdw sx="100000" sy="100000" kx="0" ky="0" algn="bl" rotWithShape="0" blurRad="101600" dist="38100" dir="2700000">
+              <a:srgbClr val="000000">
+                <a:alpha val="12000"/>
+              </a:srgbClr>
+            </a:outerShdw>
+          </a:effectLst>
+        </p:spPr>
+      </p:sp>
+      <p:sp>
+        <p:nvSpPr>
+          <p:cNvPr id="10" name="Text 8"/>
+          <p:cNvSpPr/>
+          <p:nvPr/>
+        </p:nvSpPr>
+        <p:spPr>
+          <a:xfrm>
+            <a:off x="594360" y="2688336"/>
+            <a:ext cx="7863840" cy="420624"/>
           </a:xfrm>
           <a:prstGeom prst="rect">
             <a:avLst/>
@@ -2301,7 +2556,21 @@
               <a:buNone/>
             </a:pPr>
             <a:r>
-              <a:rPr lang="en-US" sz="1400" i="1" dirty="0">
+              <a:rPr lang="en-US" sz="1700" b="1" dirty="0">
+                <a:solidFill>
+                  <a:srgbClr val="0E1C42"/>
+                </a:solidFill>
+                <a:latin typeface="Calibri" pitchFamily="34" charset="0"/>
+                <a:ea typeface="Calibri" pitchFamily="34" charset="-122"/>
+                <a:cs typeface="Calibri" pitchFamily="34" charset="-120"/>
+              </a:rPr>
+              <a:t>integrity  </a:t>
+            </a:r>
+            <a:pPr indent="0" marL="0">
+              <a:buNone/>
+            </a:pPr>
+            <a:r>
+              <a:rPr lang="en-US" sz="1400" dirty="0">
                 <a:solidFill>
                   <a:srgbClr val="1E293B"/>
                 </a:solidFill>
@@ -2309,48 +2578,9 @@
                 <a:ea typeface="Calibri" pitchFamily="34" charset="-122"/>
                 <a:cs typeface="Calibri" pitchFamily="34" charset="-120"/>
               </a:rPr>
-              <a:t>As you read today, ask yourself: What makes the difference between a good response and a truly memorable one?</a:t>
-            </a:r>
-            <a:endParaRPr lang="en-US" sz="1400" dirty="0"/>
-          </a:p>
-        </p:txBody>
-      </p:sp>
-      <p:sp>
-        <p:nvSpPr>
-          <p:cNvPr id="6" name="Text 4"/>
-          <p:cNvSpPr/>
-          <p:nvPr/>
-        </p:nvSpPr>
-        <p:spPr>
-          <a:xfrm>
-            <a:off x="640080" y="1965960"/>
-            <a:ext cx="7863840" cy="548640"/>
-          </a:xfrm>
-          <a:prstGeom prst="rect">
-            <a:avLst/>
-          </a:prstGeom>
-          <a:noFill/>
-          <a:ln/>
-        </p:spPr>
-        <p:txBody>
-          <a:bodyPr wrap="square" lIns="0" tIns="0" rIns="0" bIns="0" rtlCol="0" anchor="ctr"/>
-          <a:lstStyle/>
-          <a:p>
-            <a:pPr indent="0" marL="0">
-              <a:buNone/>
-            </a:pPr>
-            <a:r>
-              <a:rPr lang="en-US" sz="1400" i="1" dirty="0">
-                <a:solidFill>
-                  <a:srgbClr val="1E293B"/>
-                </a:solidFill>
-                <a:latin typeface="Calibri" pitchFamily="34" charset="0"/>
-                <a:ea typeface="Calibri" pitchFamily="34" charset="-122"/>
-                <a:cs typeface="Calibri" pitchFamily="34" charset="-120"/>
-              </a:rPr>
-              <a:t>Re-read your opening paragraph. Does it name your character, their novel, and your claim? Revise it so all three are present and clear.</a:t>
-            </a:r>
-            <a:endParaRPr lang="en-US" sz="1400" dirty="0"/>
+              <a:t>Lucy's ______ was never in question — she told the truth about Narnia even when the whole family thought she was lying.</a:t>
+            </a:r>
+            <a:endParaRPr lang="en-US" sz="1700" dirty="0"/>
           </a:p>
         </p:txBody>
       </p:sp>
@@ -2388,14 +2618,34 @@
       </p:grpSpPr>
       <p:sp>
         <p:nvSpPr>
-          <p:cNvPr id="2" name="Text 0"/>
-          <p:cNvSpPr/>
-          <p:nvPr/>
-        </p:nvSpPr>
-        <p:spPr>
-          <a:xfrm>
-            <a:off x="365760" y="164592"/>
-            <a:ext cx="8412480" cy="566928"/>
+          <p:cNvPr id="2" name="Shape 0"/>
+          <p:cNvSpPr/>
+          <p:nvPr/>
+        </p:nvSpPr>
+        <p:spPr>
+          <a:xfrm>
+            <a:off x="0" y="0"/>
+            <a:ext cx="9144000" cy="566928"/>
+          </a:xfrm>
+          <a:prstGeom prst="rect">
+            <a:avLst/>
+          </a:prstGeom>
+          <a:solidFill>
+            <a:srgbClr val="34B76F"/>
+          </a:solidFill>
+          <a:ln/>
+        </p:spPr>
+      </p:sp>
+      <p:sp>
+        <p:nvSpPr>
+          <p:cNvPr id="3" name="Text 1"/>
+          <p:cNvSpPr/>
+          <p:nvPr/>
+        </p:nvSpPr>
+        <p:spPr>
+          <a:xfrm>
+            <a:off x="365760" y="54864"/>
+            <a:ext cx="8412480" cy="457200"/>
           </a:xfrm>
           <a:prstGeom prst="rect">
             <a:avLst/>
@@ -2407,11 +2657,50 @@
           <a:bodyPr wrap="square" lIns="0" tIns="0" rIns="0" bIns="0" rtlCol="0" anchor="ctr"/>
           <a:lstStyle/>
           <a:p>
-            <a:pPr algn="l" indent="0" marL="0">
-              <a:buNone/>
-            </a:pPr>
-            <a:r>
-              <a:rPr lang="en-US" sz="2800" b="1" dirty="0">
+            <a:pPr indent="0" marL="0">
+              <a:buNone/>
+            </a:pPr>
+            <a:r>
+              <a:rPr lang="en-US" sz="2200" b="1" dirty="0">
+                <a:solidFill>
+                  <a:srgbClr val="FFFFFF"/>
+                </a:solidFill>
+                <a:latin typeface="Calibri" pitchFamily="34" charset="0"/>
+                <a:ea typeface="Calibri" pitchFamily="34" charset="-122"/>
+                <a:cs typeface="Calibri" pitchFamily="34" charset="-120"/>
+              </a:rPr>
+              <a:t>📕  Read</a:t>
+            </a:r>
+            <a:endParaRPr lang="en-US" sz="2200" dirty="0"/>
+          </a:p>
+        </p:txBody>
+      </p:sp>
+      <p:sp>
+        <p:nvSpPr>
+          <p:cNvPr id="4" name="Text 2"/>
+          <p:cNvSpPr/>
+          <p:nvPr/>
+        </p:nvSpPr>
+        <p:spPr>
+          <a:xfrm>
+            <a:off x="365760" y="868680"/>
+            <a:ext cx="8412480" cy="502920"/>
+          </a:xfrm>
+          <a:prstGeom prst="rect">
+            <a:avLst/>
+          </a:prstGeom>
+          <a:noFill/>
+          <a:ln/>
+        </p:spPr>
+        <p:txBody>
+          <a:bodyPr wrap="square" lIns="0" tIns="0" rIns="0" bIns="0" rtlCol="0" anchor="ctr"/>
+          <a:lstStyle/>
+          <a:p>
+            <a:pPr indent="0" marL="0">
+              <a:buNone/>
+            </a:pPr>
+            <a:r>
+              <a:rPr lang="en-US" sz="2600" b="1" dirty="0">
                 <a:solidFill>
                   <a:srgbClr val="0E1C42"/>
                 </a:solidFill>
@@ -2419,45 +2708,22 @@
                 <a:ea typeface="Calibri" pitchFamily="34" charset="-122"/>
                 <a:cs typeface="Calibri" pitchFamily="34" charset="-120"/>
               </a:rPr>
-              <a:t>Writer’s Workshop: Week 32 · REVISE and PREPARE</a:t>
-            </a:r>
-            <a:endParaRPr lang="en-US" sz="2800" dirty="0"/>
-          </a:p>
-        </p:txBody>
-      </p:sp>
-      <p:sp>
-        <p:nvSpPr>
-          <p:cNvPr id="3" name="Shape 1"/>
-          <p:cNvSpPr/>
-          <p:nvPr/>
-        </p:nvSpPr>
-        <p:spPr>
-          <a:xfrm>
-            <a:off x="365760" y="749808"/>
-            <a:ext cx="8412480" cy="0"/>
-          </a:xfrm>
-          <a:prstGeom prst="line">
-            <a:avLst/>
-          </a:prstGeom>
-          <a:noFill/>
-          <a:ln w="19050">
-            <a:solidFill>
-              <a:srgbClr val="34B76F"/>
-            </a:solidFill>
-            <a:prstDash val="solid"/>
-          </a:ln>
-        </p:spPr>
-      </p:sp>
-      <p:sp>
-        <p:nvSpPr>
-          <p:cNvPr id="4" name="Text 2"/>
-          <p:cNvSpPr/>
-          <p:nvPr/>
-        </p:nvSpPr>
-        <p:spPr>
-          <a:xfrm>
-            <a:off x="640080" y="1371600"/>
-            <a:ext cx="7863840" cy="457200"/>
+              <a:t>Reading: Week 32</a:t>
+            </a:r>
+            <a:endParaRPr lang="en-US" sz="2600" dirty="0"/>
+          </a:p>
+        </p:txBody>
+      </p:sp>
+      <p:sp>
+        <p:nvSpPr>
+          <p:cNvPr id="5" name="Text 3"/>
+          <p:cNvSpPr/>
+          <p:nvPr/>
+        </p:nvSpPr>
+        <p:spPr>
+          <a:xfrm>
+            <a:off x="365760" y="1463040"/>
+            <a:ext cx="8229600" cy="237744"/>
           </a:xfrm>
           <a:prstGeom prst="rect">
             <a:avLst/>
@@ -2473,7 +2739,46 @@
               <a:buNone/>
             </a:pPr>
             <a:r>
-              <a:rPr lang="en-US" sz="1600" dirty="0">
+              <a:rPr lang="en-US" sz="1100" b="1" spc="100" kern="0" dirty="0">
+                <a:solidFill>
+                  <a:srgbClr val="C7922C"/>
+                </a:solidFill>
+                <a:latin typeface="Calibri" pitchFamily="34" charset="0"/>
+                <a:ea typeface="Calibri" pitchFamily="34" charset="-122"/>
+                <a:cs typeface="Calibri" pitchFamily="34" charset="-120"/>
+              </a:rPr>
+              <a:t>PAUSE &amp; THINK</a:t>
+            </a:r>
+            <a:endParaRPr lang="en-US" sz="1100" dirty="0"/>
+          </a:p>
+        </p:txBody>
+      </p:sp>
+      <p:sp>
+        <p:nvSpPr>
+          <p:cNvPr id="6" name="Text 4"/>
+          <p:cNvSpPr/>
+          <p:nvPr/>
+        </p:nvSpPr>
+        <p:spPr>
+          <a:xfrm>
+            <a:off x="365760" y="1719072"/>
+            <a:ext cx="8412480" cy="914400"/>
+          </a:xfrm>
+          <a:prstGeom prst="rect">
+            <a:avLst/>
+          </a:prstGeom>
+          <a:noFill/>
+          <a:ln/>
+        </p:spPr>
+        <p:txBody>
+          <a:bodyPr wrap="square" lIns="0" tIns="0" rIns="0" bIns="0" rtlCol="0" anchor="ctr"/>
+          <a:lstStyle/>
+          <a:p>
+            <a:pPr indent="0" marL="0">
+              <a:buNone/>
+            </a:pPr>
+            <a:r>
+              <a:rPr lang="en-US" sz="1500" dirty="0">
                 <a:solidFill>
                   <a:srgbClr val="1E293B"/>
                 </a:solidFill>
@@ -2481,48 +2786,43 @@
                 <a:ea typeface="Calibri" pitchFamily="34" charset="-122"/>
                 <a:cs typeface="Calibri" pitchFamily="34" charset="-120"/>
               </a:rPr>
-              <a:t>Open your writing assignment in Canvas.</a:t>
-            </a:r>
-            <a:endParaRPr lang="en-US" sz="1600" dirty="0"/>
-          </a:p>
-        </p:txBody>
-      </p:sp>
-      <p:sp>
-        <p:nvSpPr>
-          <p:cNvPr id="5" name="Text 3"/>
-          <p:cNvSpPr/>
-          <p:nvPr/>
-        </p:nvSpPr>
-        <p:spPr>
-          <a:xfrm>
-            <a:off x="640080" y="2011680"/>
-            <a:ext cx="7863840" cy="457200"/>
-          </a:xfrm>
-          <a:prstGeom prst="rect">
-            <a:avLst/>
-          </a:prstGeom>
-          <a:noFill/>
-          <a:ln/>
-        </p:spPr>
-        <p:txBody>
-          <a:bodyPr wrap="square" lIns="0" tIns="0" rIns="0" bIns="0" rtlCol="0" anchor="ctr"/>
-          <a:lstStyle/>
-          <a:p>
-            <a:pPr indent="0" marL="0">
-              <a:buNone/>
-            </a:pPr>
-            <a:r>
-              <a:rPr lang="en-US" sz="1400" dirty="0">
-                <a:solidFill>
-                  <a:srgbClr val="64748B"/>
-                </a:solidFill>
-                <a:latin typeface="Calibri" pitchFamily="34" charset="0"/>
-                <a:ea typeface="Calibri" pitchFamily="34" charset="-122"/>
-                <a:cs typeface="Calibri" pitchFamily="34" charset="-120"/>
-              </a:rPr>
-              <a:t>Follow the writing prompt for today's workshop.</a:t>
-            </a:r>
-            <a:endParaRPr lang="en-US" sz="1400" dirty="0"/>
+              <a:t>•  Reflect on how reading skills have grown.</a:t>
+            </a:r>
+            <a:endParaRPr lang="en-US" sz="1500" dirty="0"/>
+          </a:p>
+          <a:p>
+            <a:pPr indent="0" marL="0">
+              <a:buNone/>
+            </a:pPr>
+            <a:r>
+              <a:rPr lang="en-US" sz="1500" dirty="0">
+                <a:solidFill>
+                  <a:srgbClr val="1E293B"/>
+                </a:solidFill>
+                <a:latin typeface="Calibri" pitchFamily="34" charset="0"/>
+                <a:ea typeface="Calibri" pitchFamily="34" charset="-122"/>
+                <a:cs typeface="Calibri" pitchFamily="34" charset="-120"/>
+              </a:rPr>
+              <a:t>•  As you read today, ask yourself: What makes the difference between a good response and a truly memorable one?</a:t>
+            </a:r>
+            <a:endParaRPr lang="en-US" sz="1500" dirty="0"/>
+          </a:p>
+          <a:p>
+            <a:pPr indent="0" marL="0">
+              <a:buNone/>
+            </a:pPr>
+            <a:r>
+              <a:rPr lang="en-US" sz="1500" dirty="0">
+                <a:solidFill>
+                  <a:srgbClr val="1E293B"/>
+                </a:solidFill>
+                <a:latin typeface="Calibri" pitchFamily="34" charset="0"/>
+                <a:ea typeface="Calibri" pitchFamily="34" charset="-122"/>
+                <a:cs typeface="Calibri" pitchFamily="34" charset="-120"/>
+              </a:rPr>
+              <a:t>•  Re-read your opening paragraph. Does it name your character, their novel, and your claim? Revise it so all three are present and clear.</a:t>
+            </a:r>
+            <a:endParaRPr lang="en-US" sz="1500" dirty="0"/>
           </a:p>
         </p:txBody>
       </p:sp>
@@ -2560,14 +2860,34 @@
       </p:grpSpPr>
       <p:sp>
         <p:nvSpPr>
-          <p:cNvPr id="2" name="Text 0"/>
-          <p:cNvSpPr/>
-          <p:nvPr/>
-        </p:nvSpPr>
-        <p:spPr>
-          <a:xfrm>
-            <a:off x="365760" y="164592"/>
-            <a:ext cx="8412480" cy="566928"/>
+          <p:cNvPr id="2" name="Shape 0"/>
+          <p:cNvSpPr/>
+          <p:nvPr/>
+        </p:nvSpPr>
+        <p:spPr>
+          <a:xfrm>
+            <a:off x="0" y="0"/>
+            <a:ext cx="9144000" cy="566928"/>
+          </a:xfrm>
+          <a:prstGeom prst="rect">
+            <a:avLst/>
+          </a:prstGeom>
+          <a:solidFill>
+            <a:srgbClr val="C7922C"/>
+          </a:solidFill>
+          <a:ln/>
+        </p:spPr>
+      </p:sp>
+      <p:sp>
+        <p:nvSpPr>
+          <p:cNvPr id="3" name="Text 1"/>
+          <p:cNvSpPr/>
+          <p:nvPr/>
+        </p:nvSpPr>
+        <p:spPr>
+          <a:xfrm>
+            <a:off x="365760" y="54864"/>
+            <a:ext cx="8412480" cy="457200"/>
           </a:xfrm>
           <a:prstGeom prst="rect">
             <a:avLst/>
@@ -2579,46 +2899,23 @@
           <a:bodyPr wrap="square" lIns="0" tIns="0" rIns="0" bIns="0" rtlCol="0" anchor="ctr"/>
           <a:lstStyle/>
           <a:p>
-            <a:pPr algn="l" indent="0" marL="0">
-              <a:buNone/>
-            </a:pPr>
-            <a:r>
-              <a:rPr lang="en-US" sz="2800" b="1" dirty="0">
-                <a:solidFill>
-                  <a:srgbClr val="0E1C42"/>
-                </a:solidFill>
-                <a:latin typeface="Calibri" pitchFamily="34" charset="0"/>
-                <a:ea typeface="Calibri" pitchFamily="34" charset="-122"/>
-                <a:cs typeface="Calibri" pitchFamily="34" charset="-120"/>
-              </a:rPr>
-              <a:t>✏️ 10-Minute Write</a:t>
-            </a:r>
-            <a:endParaRPr lang="en-US" sz="2800" dirty="0"/>
-          </a:p>
-        </p:txBody>
-      </p:sp>
-      <p:sp>
-        <p:nvSpPr>
-          <p:cNvPr id="3" name="Shape 1"/>
-          <p:cNvSpPr/>
-          <p:nvPr/>
-        </p:nvSpPr>
-        <p:spPr>
-          <a:xfrm>
-            <a:off x="365760" y="749808"/>
-            <a:ext cx="8412480" cy="0"/>
-          </a:xfrm>
-          <a:prstGeom prst="line">
-            <a:avLst/>
-          </a:prstGeom>
-          <a:noFill/>
-          <a:ln w="19050">
-            <a:solidFill>
-              <a:srgbClr val="C7922C"/>
-            </a:solidFill>
-            <a:prstDash val="solid"/>
-          </a:ln>
-        </p:spPr>
+            <a:pPr indent="0" marL="0">
+              <a:buNone/>
+            </a:pPr>
+            <a:r>
+              <a:rPr lang="en-US" sz="2200" b="1" dirty="0">
+                <a:solidFill>
+                  <a:srgbClr val="FFFFFF"/>
+                </a:solidFill>
+                <a:latin typeface="Calibri" pitchFamily="34" charset="0"/>
+                <a:ea typeface="Calibri" pitchFamily="34" charset="-122"/>
+                <a:cs typeface="Calibri" pitchFamily="34" charset="-120"/>
+              </a:rPr>
+              <a:t>✍️  10-Minute Write</a:t>
+            </a:r>
+            <a:endParaRPr lang="en-US" sz="2200" dirty="0"/>
+          </a:p>
+        </p:txBody>
       </p:sp>
       <p:sp>
         <p:nvSpPr>
@@ -2628,8 +2925,8 @@
         </p:nvSpPr>
         <p:spPr>
           <a:xfrm>
-            <a:off x="457200" y="1005840"/>
-            <a:ext cx="8046720" cy="292608"/>
+            <a:off x="365760" y="822960"/>
+            <a:ext cx="8229600" cy="237744"/>
           </a:xfrm>
           <a:prstGeom prst="rect">
             <a:avLst/>
@@ -2645,7 +2942,7 @@
               <a:buNone/>
             </a:pPr>
             <a:r>
-              <a:rPr lang="en-US" sz="1100" b="1" spc="200" kern="0" dirty="0">
+              <a:rPr lang="en-US" sz="1100" b="1" spc="100" kern="0" dirty="0">
                 <a:solidFill>
                   <a:srgbClr val="C7922C"/>
                 </a:solidFill>
@@ -2653,7 +2950,7 @@
                 <a:ea typeface="Calibri" pitchFamily="34" charset="-122"/>
                 <a:cs typeface="Calibri" pitchFamily="34" charset="-120"/>
               </a:rPr>
-              <a:t>📖 READ THE PROMPT — 1 MINUTE</a:t>
+              <a:t>READ THE PROMPT — 1 MINUTE</a:t>
             </a:r>
             <a:endParaRPr lang="en-US" sz="1100" dirty="0"/>
           </a:p>
@@ -2667,18 +2964,18 @@
         </p:nvSpPr>
         <p:spPr>
           <a:xfrm>
-            <a:off x="457200" y="1417320"/>
-            <a:ext cx="8229600" cy="1645920"/>
+            <a:off x="365760" y="1143000"/>
+            <a:ext cx="8412480" cy="1737360"/>
           </a:xfrm>
           <a:prstGeom prst="roundRect">
             <a:avLst>
-              <a:gd name="adj" fmla="val 5556"/>
+              <a:gd name="adj" fmla="val 5263"/>
             </a:avLst>
           </a:prstGeom>
           <a:solidFill>
             <a:srgbClr val="FEF6E8"/>
           </a:solidFill>
-          <a:ln w="12700">
+          <a:ln w="19050">
             <a:solidFill>
               <a:srgbClr val="C7922C"/>
             </a:solidFill>
@@ -2701,8 +2998,8 @@
         </p:nvSpPr>
         <p:spPr>
           <a:xfrm>
-            <a:off x="640080" y="1527048"/>
-            <a:ext cx="7863840" cy="1417320"/>
+            <a:off x="594360" y="1271016"/>
+            <a:ext cx="7955280" cy="1481328"/>
           </a:xfrm>
           <a:prstGeom prst="rect">
             <a:avLst/>
@@ -2718,7 +3015,7 @@
               <a:buNone/>
             </a:pPr>
             <a:r>
-              <a:rPr lang="en-US" sz="1800" i="1" dirty="0">
+              <a:rPr lang="en-US" sz="1700" dirty="0">
                 <a:solidFill>
                   <a:srgbClr val="1E293B"/>
                 </a:solidFill>
@@ -2726,9 +3023,9 @@
                 <a:ea typeface="Calibri" pitchFamily="34" charset="-122"/>
                 <a:cs typeface="Calibri" pitchFamily="34" charset="-120"/>
               </a:rPr>
-              <a:t>This year you have read novels about courage, honesty, kindness, and sacrifice. Which of those is the hardest to do in real life? Write about why you think so.</a:t>
-            </a:r>
-            <a:endParaRPr lang="en-US" sz="1800" dirty="0"/>
+              <a:t>Write about how you have changed as a reader since the first week of school.</a:t>
+            </a:r>
+            <a:endParaRPr lang="en-US" sz="1700" dirty="0"/>
           </a:p>
         </p:txBody>
       </p:sp>
@@ -2740,8 +3037,8 @@
         </p:nvSpPr>
         <p:spPr>
           <a:xfrm>
-            <a:off x="640080" y="3246120"/>
-            <a:ext cx="7863840" cy="457200"/>
+            <a:off x="365760" y="3063240"/>
+            <a:ext cx="8412480" cy="365760"/>
           </a:xfrm>
           <a:prstGeom prst="rect">
             <a:avLst/>
@@ -2757,59 +3054,17 @@
               <a:buNone/>
             </a:pPr>
             <a:r>
-              <a:rPr lang="en-US" sz="1400" b="1" dirty="0">
-                <a:solidFill>
-                  <a:srgbClr val="0E1C42"/>
-                </a:solidFill>
-                <a:latin typeface="Calibri" pitchFamily="34" charset="0"/>
-                <a:ea typeface="Calibri" pitchFamily="34" charset="-122"/>
-                <a:cs typeface="Calibri" pitchFamily="34" charset="-120"/>
-              </a:rPr>
-              <a:t>Type in the chat </a:t>
-            </a:r>
-            <a:pPr indent="0" marL="0">
-              <a:buNone/>
-            </a:pPr>
-            <a:r>
-              <a:rPr lang="en-US" sz="1400" dirty="0">
-                <a:solidFill>
-                  <a:srgbClr val="1E293B"/>
-                </a:solidFill>
-                <a:latin typeface="Calibri" pitchFamily="34" charset="0"/>
-                <a:ea typeface="Calibri" pitchFamily="34" charset="-122"/>
-                <a:cs typeface="Calibri" pitchFamily="34" charset="-120"/>
-              </a:rPr>
-              <a:t>or </a:t>
-            </a:r>
-            <a:pPr indent="0" marL="0">
-              <a:buNone/>
-            </a:pPr>
-            <a:r>
-              <a:rPr lang="en-US" sz="1400" b="1" dirty="0">
-                <a:solidFill>
-                  <a:srgbClr val="0E1C42"/>
-                </a:solidFill>
-                <a:latin typeface="Calibri" pitchFamily="34" charset="0"/>
-                <a:ea typeface="Calibri" pitchFamily="34" charset="-122"/>
-                <a:cs typeface="Calibri" pitchFamily="34" charset="-120"/>
-              </a:rPr>
-              <a:t>write on paper</a:t>
-            </a:r>
-            <a:pPr indent="0" marL="0">
-              <a:buNone/>
-            </a:pPr>
-            <a:r>
-              <a:rPr lang="en-US" sz="1400" dirty="0">
-                <a:solidFill>
-                  <a:srgbClr val="1E293B"/>
-                </a:solidFill>
-                <a:latin typeface="Calibri" pitchFamily="34" charset="0"/>
-                <a:ea typeface="Calibri" pitchFamily="34" charset="-122"/>
-                <a:cs typeface="Calibri" pitchFamily="34" charset="-120"/>
-              </a:rPr>
-              <a:t> to hold up when we share.</a:t>
-            </a:r>
-            <a:endParaRPr lang="en-US" sz="1400" dirty="0"/>
+              <a:rPr lang="en-US" sz="1600" i="1" dirty="0">
+                <a:solidFill>
+                  <a:srgbClr val="64748B"/>
+                </a:solidFill>
+                <a:latin typeface="Calibri" pitchFamily="34" charset="0"/>
+                <a:ea typeface="Calibri" pitchFamily="34" charset="-122"/>
+                <a:cs typeface="Calibri" pitchFamily="34" charset="-120"/>
+              </a:rPr>
+              <a:t>Think first. You will have five minutes to write.</a:t>
+            </a:r>
+            <a:endParaRPr lang="en-US" sz="1600" dirty="0"/>
           </a:p>
         </p:txBody>
       </p:sp>
@@ -2847,14 +3102,34 @@
       </p:grpSpPr>
       <p:sp>
         <p:nvSpPr>
-          <p:cNvPr id="2" name="Text 0"/>
-          <p:cNvSpPr/>
-          <p:nvPr/>
-        </p:nvSpPr>
-        <p:spPr>
-          <a:xfrm>
-            <a:off x="457200" y="228600"/>
-            <a:ext cx="8229600" cy="640080"/>
+          <p:cNvPr id="2" name="Shape 0"/>
+          <p:cNvSpPr/>
+          <p:nvPr/>
+        </p:nvSpPr>
+        <p:spPr>
+          <a:xfrm>
+            <a:off x="0" y="0"/>
+            <a:ext cx="9144000" cy="566928"/>
+          </a:xfrm>
+          <a:prstGeom prst="rect">
+            <a:avLst/>
+          </a:prstGeom>
+          <a:solidFill>
+            <a:srgbClr val="C7922C"/>
+          </a:solidFill>
+          <a:ln/>
+        </p:spPr>
+      </p:sp>
+      <p:sp>
+        <p:nvSpPr>
+          <p:cNvPr id="3" name="Text 1"/>
+          <p:cNvSpPr/>
+          <p:nvPr/>
+        </p:nvSpPr>
+        <p:spPr>
+          <a:xfrm>
+            <a:off x="365760" y="54864"/>
+            <a:ext cx="8412480" cy="457200"/>
           </a:xfrm>
           <a:prstGeom prst="rect">
             <a:avLst/>
@@ -2866,11 +3141,50 @@
           <a:bodyPr wrap="square" lIns="0" tIns="0" rIns="0" bIns="0" rtlCol="0" anchor="ctr"/>
           <a:lstStyle/>
           <a:p>
-            <a:pPr algn="ctr" indent="0" marL="0">
-              <a:buNone/>
-            </a:pPr>
-            <a:r>
-              <a:rPr lang="en-US" sz="3200" b="1" dirty="0">
+            <a:pPr indent="0" marL="0">
+              <a:buNone/>
+            </a:pPr>
+            <a:r>
+              <a:rPr lang="en-US" sz="2200" b="1" dirty="0">
+                <a:solidFill>
+                  <a:srgbClr val="FFFFFF"/>
+                </a:solidFill>
+                <a:latin typeface="Calibri" pitchFamily="34" charset="0"/>
+                <a:ea typeface="Calibri" pitchFamily="34" charset="-122"/>
+                <a:cs typeface="Calibri" pitchFamily="34" charset="-120"/>
+              </a:rPr>
+              <a:t>✍️  Writing Time</a:t>
+            </a:r>
+            <a:endParaRPr lang="en-US" sz="2200" dirty="0"/>
+          </a:p>
+        </p:txBody>
+      </p:sp>
+      <p:sp>
+        <p:nvSpPr>
+          <p:cNvPr id="4" name="Text 2"/>
+          <p:cNvSpPr/>
+          <p:nvPr/>
+        </p:nvSpPr>
+        <p:spPr>
+          <a:xfrm>
+            <a:off x="365760" y="868680"/>
+            <a:ext cx="8412480" cy="502920"/>
+          </a:xfrm>
+          <a:prstGeom prst="rect">
+            <a:avLst/>
+          </a:prstGeom>
+          <a:noFill/>
+          <a:ln/>
+        </p:spPr>
+        <p:txBody>
+          <a:bodyPr wrap="square" lIns="0" tIns="0" rIns="0" bIns="0" rtlCol="0" anchor="ctr"/>
+          <a:lstStyle/>
+          <a:p>
+            <a:pPr indent="0" marL="0">
+              <a:buNone/>
+            </a:pPr>
+            <a:r>
+              <a:rPr lang="en-US" sz="2600" b="1" dirty="0">
                 <a:solidFill>
                   <a:srgbClr val="0E1C42"/>
                 </a:solidFill>
@@ -2878,22 +3192,22 @@
                 <a:ea typeface="Calibri" pitchFamily="34" charset="-122"/>
                 <a:cs typeface="Calibri" pitchFamily="34" charset="-120"/>
               </a:rPr>
-              <a:t>✏️  Writing Time</a:t>
-            </a:r>
-            <a:endParaRPr lang="en-US" sz="3200" dirty="0"/>
-          </a:p>
-        </p:txBody>
-      </p:sp>
-      <p:sp>
-        <p:nvSpPr>
-          <p:cNvPr id="3" name="Text 1"/>
-          <p:cNvSpPr/>
-          <p:nvPr/>
-        </p:nvSpPr>
-        <p:spPr>
-          <a:xfrm>
-            <a:off x="914400" y="822960"/>
-            <a:ext cx="7315200" cy="365760"/>
+              <a:t>5 minutes — keep your pencil moving!</a:t>
+            </a:r>
+            <a:endParaRPr lang="en-US" sz="2600" dirty="0"/>
+          </a:p>
+        </p:txBody>
+      </p:sp>
+      <p:sp>
+        <p:nvSpPr>
+          <p:cNvPr id="5" name="Text 3"/>
+          <p:cNvSpPr/>
+          <p:nvPr/>
+        </p:nvSpPr>
+        <p:spPr>
+          <a:xfrm>
+            <a:off x="365760" y="1463040"/>
+            <a:ext cx="8229600" cy="237744"/>
           </a:xfrm>
           <a:prstGeom prst="rect">
             <a:avLst/>
@@ -2905,11 +3219,11 @@
           <a:bodyPr wrap="square" lIns="0" tIns="0" rIns="0" bIns="0" rtlCol="0" anchor="ctr"/>
           <a:lstStyle/>
           <a:p>
-            <a:pPr algn="ctr" indent="0" marL="0">
-              <a:buNone/>
-            </a:pPr>
-            <a:r>
-              <a:rPr lang="en-US" sz="1600" dirty="0">
+            <a:pPr indent="0" marL="0">
+              <a:buNone/>
+            </a:pPr>
+            <a:r>
+              <a:rPr lang="en-US" sz="1100" b="1" spc="100" kern="0" dirty="0">
                 <a:solidFill>
                   <a:srgbClr val="C7922C"/>
                 </a:solidFill>
@@ -2917,32 +3231,32 @@
                 <a:ea typeface="Calibri" pitchFamily="34" charset="-122"/>
                 <a:cs typeface="Calibri" pitchFamily="34" charset="-120"/>
               </a:rPr>
-              <a:t>5 minutes — keep your pencil moving!</a:t>
-            </a:r>
-            <a:endParaRPr lang="en-US" sz="1600" dirty="0"/>
-          </a:p>
-        </p:txBody>
-      </p:sp>
-      <p:sp>
-        <p:nvSpPr>
-          <p:cNvPr id="4" name="Shape 2"/>
-          <p:cNvSpPr/>
-          <p:nvPr/>
-        </p:nvSpPr>
-        <p:spPr>
-          <a:xfrm>
-            <a:off x="457200" y="1371600"/>
-            <a:ext cx="8229600" cy="1280160"/>
+              <a:t>YOUR PROMPT</a:t>
+            </a:r>
+            <a:endParaRPr lang="en-US" sz="1100" dirty="0"/>
+          </a:p>
+        </p:txBody>
+      </p:sp>
+      <p:sp>
+        <p:nvSpPr>
+          <p:cNvPr id="6" name="Shape 4"/>
+          <p:cNvSpPr/>
+          <p:nvPr/>
+        </p:nvSpPr>
+        <p:spPr>
+          <a:xfrm>
+            <a:off x="365760" y="1737360"/>
+            <a:ext cx="8412480" cy="1417320"/>
           </a:xfrm>
           <a:prstGeom prst="roundRect">
             <a:avLst>
-              <a:gd name="adj" fmla="val 7143"/>
+              <a:gd name="adj" fmla="val 6452"/>
             </a:avLst>
           </a:prstGeom>
           <a:solidFill>
             <a:srgbClr val="FFFFFF"/>
           </a:solidFill>
-          <a:ln w="12700">
+          <a:ln w="19050">
             <a:solidFill>
               <a:srgbClr val="C7922C"/>
             </a:solidFill>
@@ -2959,44 +3273,30 @@
       </p:sp>
       <p:sp>
         <p:nvSpPr>
-          <p:cNvPr id="5" name="Text 3"/>
-          <p:cNvSpPr/>
-          <p:nvPr/>
-        </p:nvSpPr>
-        <p:spPr>
-          <a:xfrm>
-            <a:off x="640080" y="1417320"/>
-            <a:ext cx="7863840" cy="1188720"/>
-          </a:xfrm>
-          <a:prstGeom prst="rect">
-            <a:avLst/>
-          </a:prstGeom>
-          <a:noFill/>
-          <a:ln/>
-        </p:spPr>
-        <p:txBody>
-          <a:bodyPr wrap="square" lIns="0" tIns="0" rIns="0" bIns="0" rtlCol="0" anchor="t"/>
-          <a:lstStyle/>
-          <a:p>
-            <a:pPr indent="0" marL="0">
-              <a:buNone/>
-            </a:pPr>
-            <a:r>
-              <a:rPr lang="en-US" sz="1200" b="1" dirty="0">
-                <a:solidFill>
-                  <a:srgbClr val="C7922C"/>
-                </a:solidFill>
-                <a:latin typeface="Calibri" pitchFamily="34" charset="0"/>
-                <a:ea typeface="Calibri" pitchFamily="34" charset="-122"/>
-                <a:cs typeface="Calibri" pitchFamily="34" charset="-120"/>
-              </a:rPr>
-              <a:t>📖 Prompt: </a:t>
-            </a:r>
-            <a:pPr indent="0" marL="0">
-              <a:buNone/>
-            </a:pPr>
-            <a:r>
-              <a:rPr lang="en-US" sz="1200" i="1" dirty="0">
+          <p:cNvPr id="7" name="Text 5"/>
+          <p:cNvSpPr/>
+          <p:nvPr/>
+        </p:nvSpPr>
+        <p:spPr>
+          <a:xfrm>
+            <a:off x="594360" y="1865376"/>
+            <a:ext cx="7955280" cy="1161288"/>
+          </a:xfrm>
+          <a:prstGeom prst="rect">
+            <a:avLst/>
+          </a:prstGeom>
+          <a:noFill/>
+          <a:ln/>
+        </p:spPr>
+        <p:txBody>
+          <a:bodyPr wrap="square" lIns="0" tIns="0" rIns="0" bIns="0" rtlCol="0" anchor="ctr"/>
+          <a:lstStyle/>
+          <a:p>
+            <a:pPr indent="0" marL="0">
+              <a:buNone/>
+            </a:pPr>
+            <a:r>
+              <a:rPr lang="en-US" sz="1700" dirty="0">
                 <a:solidFill>
                   <a:srgbClr val="1E293B"/>
                 </a:solidFill>
@@ -3004,122 +3304,48 @@
                 <a:ea typeface="Calibri" pitchFamily="34" charset="-122"/>
                 <a:cs typeface="Calibri" pitchFamily="34" charset="-120"/>
               </a:rPr>
-              <a:t>This year you have read novels about courage, honesty, kindness, and sacrifice. Which of those is the hardest to do in real life? Write about why you think so.</a:t>
-            </a:r>
-            <a:endParaRPr lang="en-US" sz="1200" dirty="0"/>
-          </a:p>
-        </p:txBody>
-      </p:sp>
-      <p:sp>
-        <p:nvSpPr>
-          <p:cNvPr id="6" name="Shape 4"/>
-          <p:cNvSpPr/>
-          <p:nvPr/>
-        </p:nvSpPr>
-        <p:spPr>
-          <a:xfrm>
-            <a:off x="2286000" y="2926080"/>
-            <a:ext cx="4572000" cy="1280160"/>
-          </a:xfrm>
-          <a:prstGeom prst="roundRect">
-            <a:avLst>
-              <a:gd name="adj" fmla="val 8571"/>
-            </a:avLst>
-          </a:prstGeom>
-          <a:solidFill>
-            <a:srgbClr val="FFFFFF"/>
-          </a:solidFill>
-          <a:ln/>
-          <a:effectLst>
-            <a:outerShdw sx="100000" sy="100000" kx="0" ky="0" algn="bl" rotWithShape="0" blurRad="101600" dist="38100" dir="2700000">
-              <a:srgbClr val="000000">
-                <a:alpha val="12000"/>
-              </a:srgbClr>
-            </a:outerShdw>
-          </a:effectLst>
-        </p:spPr>
-      </p:sp>
-      <p:sp>
-        <p:nvSpPr>
-          <p:cNvPr id="7" name="Text 5"/>
-          <p:cNvSpPr/>
-          <p:nvPr/>
-        </p:nvSpPr>
-        <p:spPr>
-          <a:xfrm>
-            <a:off x="2468880" y="3017520"/>
-            <a:ext cx="4206240" cy="1097280"/>
-          </a:xfrm>
-          <a:prstGeom prst="rect">
-            <a:avLst/>
-          </a:prstGeom>
-          <a:noFill/>
-          <a:ln/>
-        </p:spPr>
-        <p:txBody>
-          <a:bodyPr wrap="square" lIns="0" tIns="0" rIns="0" bIns="0" rtlCol="0" anchor="t"/>
-          <a:lstStyle/>
-          <a:p>
-            <a:pPr indent="0" marL="0">
-              <a:buNone/>
-            </a:pPr>
-            <a:r>
-              <a:rPr lang="en-US" sz="1400" b="1" dirty="0">
-                <a:solidFill>
-                  <a:srgbClr val="0E1C42"/>
-                </a:solidFill>
-                <a:latin typeface="Calibri" pitchFamily="34" charset="0"/>
-                <a:ea typeface="Calibri" pitchFamily="34" charset="-122"/>
-                <a:cs typeface="Calibri" pitchFamily="34" charset="-120"/>
-              </a:rPr>
-              <a:t>If you get stuck:
-</a:t>
-            </a:r>
-            <a:pPr indent="0" marL="0">
-              <a:buNone/>
-            </a:pPr>
-            <a:r>
-              <a:rPr lang="en-US" sz="1300" dirty="0">
-                <a:solidFill>
-                  <a:srgbClr val="1E293B"/>
-                </a:solidFill>
-                <a:latin typeface="Calibri" pitchFamily="34" charset="0"/>
-                <a:ea typeface="Calibri" pitchFamily="34" charset="-122"/>
-                <a:cs typeface="Calibri" pitchFamily="34" charset="-120"/>
-              </a:rPr>
-              <a:t>• Reread the prompt above
-</a:t>
-            </a:r>
-            <a:pPr indent="0" marL="0">
-              <a:buNone/>
-            </a:pPr>
-            <a:r>
-              <a:rPr lang="en-US" sz="1300" dirty="0">
-                <a:solidFill>
-                  <a:srgbClr val="1E293B"/>
-                </a:solidFill>
-                <a:latin typeface="Calibri" pitchFamily="34" charset="0"/>
-                <a:ea typeface="Calibri" pitchFamily="34" charset="-122"/>
-                <a:cs typeface="Calibri" pitchFamily="34" charset="-120"/>
-              </a:rPr>
-              <a:t>• Write "I'm thinking..." until a new idea comes
-</a:t>
-            </a:r>
-            <a:pPr indent="0" marL="0">
-              <a:buNone/>
-            </a:pPr>
-            <a:r>
-              <a:rPr lang="en-US" sz="1300" dirty="0">
-                <a:solidFill>
-                  <a:srgbClr val="1E293B"/>
-                </a:solidFill>
-                <a:latin typeface="Calibri" pitchFamily="34" charset="0"/>
-                <a:ea typeface="Calibri" pitchFamily="34" charset="-122"/>
-                <a:cs typeface="Calibri" pitchFamily="34" charset="-120"/>
-              </a:rPr>
-              <a:t>• Keep going — don't erase!</a:t>
-            </a:r>
-            <a:endParaRPr lang="en-US" sz="1400" dirty="0"/>
+              <a:t>Write about how you have changed as a reader since the first week of school.</a:t>
+            </a:r>
+            <a:endParaRPr lang="en-US" sz="1700" dirty="0"/>
+          </a:p>
+        </p:txBody>
+      </p:sp>
+      <p:sp>
+        <p:nvSpPr>
+          <p:cNvPr id="8" name="Text 6"/>
+          <p:cNvSpPr/>
+          <p:nvPr/>
+        </p:nvSpPr>
+        <p:spPr>
+          <a:xfrm>
+            <a:off x="365760" y="3291840"/>
+            <a:ext cx="8412480" cy="365760"/>
+          </a:xfrm>
+          <a:prstGeom prst="rect">
+            <a:avLst/>
+          </a:prstGeom>
+          <a:noFill/>
+          <a:ln/>
+        </p:spPr>
+        <p:txBody>
+          <a:bodyPr wrap="square" lIns="0" tIns="0" rIns="0" bIns="0" rtlCol="0" anchor="ctr"/>
+          <a:lstStyle/>
+          <a:p>
+            <a:pPr indent="0" marL="0">
+              <a:buNone/>
+            </a:pPr>
+            <a:r>
+              <a:rPr lang="en-US" sz="1500" i="1" dirty="0">
+                <a:solidFill>
+                  <a:srgbClr val="64748B"/>
+                </a:solidFill>
+                <a:latin typeface="Calibri" pitchFamily="34" charset="0"/>
+                <a:ea typeface="Calibri" pitchFamily="34" charset="-122"/>
+                <a:cs typeface="Calibri" pitchFamily="34" charset="-120"/>
+              </a:rPr>
+              <a:t>Do not stop to erase. If you get stuck, write the last word again and keep going.</a:t>
+            </a:r>
+            <a:endParaRPr lang="en-US" sz="1500" dirty="0"/>
           </a:p>
         </p:txBody>
       </p:sp>
@@ -3157,14 +3383,34 @@
       </p:grpSpPr>
       <p:sp>
         <p:nvSpPr>
-          <p:cNvPr id="2" name="Text 0"/>
-          <p:cNvSpPr/>
-          <p:nvPr/>
-        </p:nvSpPr>
-        <p:spPr>
-          <a:xfrm>
-            <a:off x="3657600" y="365760"/>
-            <a:ext cx="1828800" cy="640080"/>
+          <p:cNvPr id="2" name="Shape 0"/>
+          <p:cNvSpPr/>
+          <p:nvPr/>
+        </p:nvSpPr>
+        <p:spPr>
+          <a:xfrm>
+            <a:off x="0" y="0"/>
+            <a:ext cx="9144000" cy="566928"/>
+          </a:xfrm>
+          <a:prstGeom prst="rect">
+            <a:avLst/>
+          </a:prstGeom>
+          <a:solidFill>
+            <a:srgbClr val="34B76F"/>
+          </a:solidFill>
+          <a:ln/>
+        </p:spPr>
+      </p:sp>
+      <p:sp>
+        <p:nvSpPr>
+          <p:cNvPr id="3" name="Text 1"/>
+          <p:cNvSpPr/>
+          <p:nvPr/>
+        </p:nvSpPr>
+        <p:spPr>
+          <a:xfrm>
+            <a:off x="365760" y="54864"/>
+            <a:ext cx="8412480" cy="457200"/>
           </a:xfrm>
           <a:prstGeom prst="rect">
             <a:avLst/>
@@ -3176,31 +3422,34 @@
           <a:bodyPr wrap="square" lIns="0" tIns="0" rIns="0" bIns="0" rtlCol="0" anchor="ctr"/>
           <a:lstStyle/>
           <a:p>
-            <a:pPr algn="ctr" indent="0" marL="0">
-              <a:buNone/>
-            </a:pPr>
-            <a:r>
-              <a:rPr lang="en-US" sz="4000" dirty="0">
-                <a:solidFill>
-                  <a:srgbClr val="000000"/>
-                </a:solidFill>
-              </a:rPr>
-              <a:t>🔍</a:t>
-            </a:r>
-            <a:endParaRPr lang="en-US" sz="4000" dirty="0"/>
-          </a:p>
-        </p:txBody>
-      </p:sp>
-      <p:sp>
-        <p:nvSpPr>
-          <p:cNvPr id="3" name="Text 1"/>
-          <p:cNvSpPr/>
-          <p:nvPr/>
-        </p:nvSpPr>
-        <p:spPr>
-          <a:xfrm>
-            <a:off x="914400" y="914400"/>
-            <a:ext cx="7315200" cy="640080"/>
+            <a:pPr indent="0" marL="0">
+              <a:buNone/>
+            </a:pPr>
+            <a:r>
+              <a:rPr lang="en-US" sz="2200" b="1" dirty="0">
+                <a:solidFill>
+                  <a:srgbClr val="FFFFFF"/>
+                </a:solidFill>
+                <a:latin typeface="Calibri" pitchFamily="34" charset="0"/>
+                <a:ea typeface="Calibri" pitchFamily="34" charset="-122"/>
+                <a:cs typeface="Calibri" pitchFamily="34" charset="-120"/>
+              </a:rPr>
+              <a:t>🔍  Edit &amp; Revise</a:t>
+            </a:r>
+            <a:endParaRPr lang="en-US" sz="2200" dirty="0"/>
+          </a:p>
+        </p:txBody>
+      </p:sp>
+      <p:sp>
+        <p:nvSpPr>
+          <p:cNvPr id="4" name="Text 2"/>
+          <p:cNvSpPr/>
+          <p:nvPr/>
+        </p:nvSpPr>
+        <p:spPr>
+          <a:xfrm>
+            <a:off x="365760" y="868680"/>
+            <a:ext cx="8412480" cy="457200"/>
           </a:xfrm>
           <a:prstGeom prst="rect">
             <a:avLst/>
@@ -3212,11 +3461,11 @@
           <a:bodyPr wrap="square" lIns="0" tIns="0" rIns="0" bIns="0" rtlCol="0" anchor="ctr"/>
           <a:lstStyle/>
           <a:p>
-            <a:pPr algn="ctr" indent="0" marL="0">
-              <a:buNone/>
-            </a:pPr>
-            <a:r>
-              <a:rPr lang="en-US" sz="3200" b="1" dirty="0">
+            <a:pPr indent="0" marL="0">
+              <a:buNone/>
+            </a:pPr>
+            <a:r>
+              <a:rPr lang="en-US" sz="2400" b="1" dirty="0">
                 <a:solidFill>
                   <a:srgbClr val="0E1C42"/>
                 </a:solidFill>
@@ -3224,22 +3473,22 @@
                 <a:ea typeface="Calibri" pitchFamily="34" charset="-122"/>
                 <a:cs typeface="Calibri" pitchFamily="34" charset="-120"/>
               </a:rPr>
-              <a:t>Edit &amp; Revise</a:t>
-            </a:r>
-            <a:endParaRPr lang="en-US" sz="3200" dirty="0"/>
-          </a:p>
-        </p:txBody>
-      </p:sp>
-      <p:sp>
-        <p:nvSpPr>
-          <p:cNvPr id="4" name="Text 2"/>
-          <p:cNvSpPr/>
-          <p:nvPr/>
-        </p:nvSpPr>
-        <p:spPr>
-          <a:xfrm>
-            <a:off x="914400" y="1508760"/>
-            <a:ext cx="7315200" cy="457200"/>
+              <a:t>1 minute — pick ONE thing to fix.</a:t>
+            </a:r>
+            <a:endParaRPr lang="en-US" sz="2400" dirty="0"/>
+          </a:p>
+        </p:txBody>
+      </p:sp>
+      <p:sp>
+        <p:nvSpPr>
+          <p:cNvPr id="5" name="Text 3"/>
+          <p:cNvSpPr/>
+          <p:nvPr/>
+        </p:nvSpPr>
+        <p:spPr>
+          <a:xfrm>
+            <a:off x="365760" y="1417320"/>
+            <a:ext cx="8229600" cy="237744"/>
           </a:xfrm>
           <a:prstGeom prst="rect">
             <a:avLst/>
@@ -3251,11 +3500,11 @@
           <a:bodyPr wrap="square" lIns="0" tIns="0" rIns="0" bIns="0" rtlCol="0" anchor="ctr"/>
           <a:lstStyle/>
           <a:p>
-            <a:pPr algn="ctr" indent="0" marL="0">
-              <a:buNone/>
-            </a:pPr>
-            <a:r>
-              <a:rPr lang="en-US" sz="1600" dirty="0">
+            <a:pPr indent="0" marL="0">
+              <a:buNone/>
+            </a:pPr>
+            <a:r>
+              <a:rPr lang="en-US" sz="1100" b="1" spc="100" kern="0" dirty="0">
                 <a:solidFill>
                   <a:srgbClr val="34B76F"/>
                 </a:solidFill>
@@ -3263,26 +3512,26 @@
                 <a:ea typeface="Calibri" pitchFamily="34" charset="-122"/>
                 <a:cs typeface="Calibri" pitchFamily="34" charset="-120"/>
               </a:rPr>
-              <a:t>1 minute — pick ONE thing to fix</a:t>
-            </a:r>
-            <a:endParaRPr lang="en-US" sz="1600" dirty="0"/>
-          </a:p>
-        </p:txBody>
-      </p:sp>
-      <p:sp>
-        <p:nvSpPr>
-          <p:cNvPr id="5" name="Shape 3"/>
-          <p:cNvSpPr/>
-          <p:nvPr/>
-        </p:nvSpPr>
-        <p:spPr>
-          <a:xfrm>
-            <a:off x="1371600" y="2103120"/>
-            <a:ext cx="6400800" cy="640080"/>
+              <a:t>TODAY'S EDIT FOCUS</a:t>
+            </a:r>
+            <a:endParaRPr lang="en-US" sz="1100" dirty="0"/>
+          </a:p>
+        </p:txBody>
+      </p:sp>
+      <p:sp>
+        <p:nvSpPr>
+          <p:cNvPr id="6" name="Shape 4"/>
+          <p:cNvSpPr/>
+          <p:nvPr/>
+        </p:nvSpPr>
+        <p:spPr>
+          <a:xfrm>
+            <a:off x="365760" y="1691640"/>
+            <a:ext cx="8412480" cy="777240"/>
           </a:xfrm>
           <a:prstGeom prst="roundRect">
             <a:avLst>
-              <a:gd name="adj" fmla="val 14286"/>
+              <a:gd name="adj" fmla="val 11765"/>
             </a:avLst>
           </a:prstGeom>
           <a:solidFill>
@@ -3305,14 +3554,14 @@
       </p:sp>
       <p:sp>
         <p:nvSpPr>
-          <p:cNvPr id="6" name="Text 4"/>
-          <p:cNvSpPr/>
-          <p:nvPr/>
-        </p:nvSpPr>
-        <p:spPr>
-          <a:xfrm>
-            <a:off x="1554480" y="2148840"/>
-            <a:ext cx="6035040" cy="548640"/>
+          <p:cNvPr id="7" name="Text 5"/>
+          <p:cNvSpPr/>
+          <p:nvPr/>
+        </p:nvSpPr>
+        <p:spPr>
+          <a:xfrm>
+            <a:off x="594360" y="1819656"/>
+            <a:ext cx="7955280" cy="521208"/>
           </a:xfrm>
           <a:prstGeom prst="rect">
             <a:avLst/>
@@ -3328,21 +3577,7 @@
               <a:buNone/>
             </a:pPr>
             <a:r>
-              <a:rPr lang="en-US" sz="1400" b="1" dirty="0">
-                <a:solidFill>
-                  <a:srgbClr val="34B76F"/>
-                </a:solidFill>
-                <a:latin typeface="Calibri" pitchFamily="34" charset="0"/>
-                <a:ea typeface="Calibri" pitchFamily="34" charset="-122"/>
-                <a:cs typeface="Calibri" pitchFamily="34" charset="-120"/>
-              </a:rPr>
-              <a:t>Today's check: </a:t>
-            </a:r>
-            <a:pPr indent="0" marL="0">
-              <a:buNone/>
-            </a:pPr>
-            <a:r>
-              <a:rPr lang="en-US" sz="1400" dirty="0">
+              <a:rPr lang="en-US" sz="1700" dirty="0">
                 <a:solidFill>
                   <a:srgbClr val="1E293B"/>
                 </a:solidFill>
@@ -3350,40 +3585,11 @@
                 <a:ea typeface="Calibri" pitchFamily="34" charset="-122"/>
                 <a:cs typeface="Calibri" pitchFamily="34" charset="-120"/>
               </a:rPr>
-              <a:t>Did I give reasons for my choice, not just pick one?</a:t>
-            </a:r>
-            <a:endParaRPr lang="en-US" sz="1400" dirty="0"/>
-          </a:p>
-        </p:txBody>
-      </p:sp>
-      <p:sp>
-        <p:nvSpPr>
-          <p:cNvPr id="7" name="Shape 5"/>
-          <p:cNvSpPr/>
-          <p:nvPr/>
-        </p:nvSpPr>
-        <p:spPr>
-          <a:xfrm>
-            <a:off x="1371600" y="2926080"/>
-            <a:ext cx="6400800" cy="1463040"/>
-          </a:xfrm>
-          <a:prstGeom prst="roundRect">
-            <a:avLst>
-              <a:gd name="adj" fmla="val 6250"/>
-            </a:avLst>
-          </a:prstGeom>
-          <a:solidFill>
-            <a:srgbClr val="FFFFFF"/>
-          </a:solidFill>
-          <a:ln/>
-          <a:effectLst>
-            <a:outerShdw sx="100000" sy="100000" kx="0" ky="0" algn="bl" rotWithShape="0" blurRad="101600" dist="38100" dir="2700000">
-              <a:srgbClr val="000000">
-                <a:alpha val="12000"/>
-              </a:srgbClr>
-            </a:outerShdw>
-          </a:effectLst>
-        </p:spPr>
+              <a:t>Did I circle any word I was not sure how to spell?</a:t>
+            </a:r>
+            <a:endParaRPr lang="en-US" sz="1700" dirty="0"/>
+          </a:p>
+        </p:txBody>
       </p:sp>
       <p:sp>
         <p:nvSpPr>
@@ -3393,45 +3599,24 @@
         </p:nvSpPr>
         <p:spPr>
           <a:xfrm>
-            <a:off x="1554480" y="3017520"/>
-            <a:ext cx="6035040" cy="1280160"/>
-          </a:xfrm>
-          <a:prstGeom prst="rect">
-            <a:avLst/>
-          </a:prstGeom>
-          <a:noFill/>
-          <a:ln/>
-        </p:spPr>
-        <p:txBody>
-          <a:bodyPr wrap="square" lIns="0" tIns="0" rIns="0" bIns="0" rtlCol="0" anchor="t"/>
-          <a:lstStyle/>
-          <a:p>
-            <a:pPr indent="0" marL="0">
-              <a:spcAft>
-                <a:spcPts val="200"/>
-              </a:spcAft>
-              <a:buNone/>
-            </a:pPr>
-            <a:r>
-              <a:rPr lang="en-US" sz="1300" b="1" dirty="0">
-                <a:solidFill>
-                  <a:srgbClr val="0E1C42"/>
-                </a:solidFill>
-                <a:latin typeface="Calibri" pitchFamily="34" charset="0"/>
-                <a:ea typeface="Calibri" pitchFamily="34" charset="-122"/>
-                <a:cs typeface="Calibri" pitchFamily="34" charset="-120"/>
-              </a:rPr>
-              <a:t>Quick check:
-</a:t>
-            </a:r>
-            <a:pPr indent="0" marL="0">
-              <a:spcAft>
-                <a:spcPts val="200"/>
-              </a:spcAft>
-              <a:buNone/>
-            </a:pPr>
-            <a:r>
-              <a:rPr lang="en-US" sz="1200" dirty="0">
+            <a:off x="365760" y="2651760"/>
+            <a:ext cx="8412480" cy="365760"/>
+          </a:xfrm>
+          <a:prstGeom prst="rect">
+            <a:avLst/>
+          </a:prstGeom>
+          <a:noFill/>
+          <a:ln/>
+        </p:spPr>
+        <p:txBody>
+          <a:bodyPr wrap="square" lIns="0" tIns="0" rIns="0" bIns="0" rtlCol="0" anchor="ctr"/>
+          <a:lstStyle/>
+          <a:p>
+            <a:pPr indent="0" marL="0">
+              <a:buNone/>
+            </a:pPr>
+            <a:r>
+              <a:rPr lang="en-US" sz="1500" b="1" dirty="0">
                 <a:solidFill>
                   <a:srgbClr val="1E293B"/>
                 </a:solidFill>
@@ -3439,17 +3624,13 @@
                 <a:ea typeface="Calibri" pitchFamily="34" charset="-122"/>
                 <a:cs typeface="Calibri" pitchFamily="34" charset="-120"/>
               </a:rPr>
-              <a:t>□ Capital letters at the start of every sentence
-</a:t>
-            </a:r>
-            <a:pPr indent="0" marL="0">
-              <a:spcAft>
-                <a:spcPts val="200"/>
-              </a:spcAft>
-              <a:buNone/>
-            </a:pPr>
-            <a:r>
-              <a:rPr lang="en-US" sz="1200" dirty="0">
+              <a:t>Quick check:  </a:t>
+            </a:r>
+            <a:pPr indent="0" marL="0">
+              <a:buNone/>
+            </a:pPr>
+            <a:r>
+              <a:rPr lang="en-US" sz="1500" dirty="0">
                 <a:solidFill>
                   <a:srgbClr val="1E293B"/>
                 </a:solidFill>
@@ -3457,45 +3638,9 @@
                 <a:ea typeface="Calibri" pitchFamily="34" charset="-122"/>
                 <a:cs typeface="Calibri" pitchFamily="34" charset="-120"/>
               </a:rPr>
-              <a:t>□ End punctuation ( .  ?  ! )
-</a:t>
-            </a:r>
-            <a:pPr indent="0" marL="0">
-              <a:spcAft>
-                <a:spcPts val="200"/>
-              </a:spcAft>
-              <a:buNone/>
-            </a:pPr>
-            <a:r>
-              <a:rPr lang="en-US" sz="1200" dirty="0">
-                <a:solidFill>
-                  <a:srgbClr val="1E293B"/>
-                </a:solidFill>
-                <a:latin typeface="Calibri" pitchFamily="34" charset="0"/>
-                <a:ea typeface="Calibri" pitchFamily="34" charset="-122"/>
-                <a:cs typeface="Calibri" pitchFamily="34" charset="-120"/>
-              </a:rPr>
-              <a:t>□ Spelling — circle any words that look wrong
-</a:t>
-            </a:r>
-            <a:pPr indent="0" marL="0">
-              <a:spcAft>
-                <a:spcPts val="200"/>
-              </a:spcAft>
-              <a:buNone/>
-            </a:pPr>
-            <a:r>
-              <a:rPr lang="en-US" sz="1200" dirty="0">
-                <a:solidFill>
-                  <a:srgbClr val="1E293B"/>
-                </a:solidFill>
-                <a:latin typeface="Calibri" pitchFamily="34" charset="0"/>
-                <a:ea typeface="Calibri" pitchFamily="34" charset="-122"/>
-                <a:cs typeface="Calibri" pitchFamily="34" charset="-120"/>
-              </a:rPr>
-              <a:t>□ Read it quietly to yourself — does it sound right?</a:t>
-            </a:r>
-            <a:endParaRPr lang="en-US" sz="1300" dirty="0"/>
+              <a:t>capitals  ·  end punctuation  ·  circle a word you are unsure of  ·  read it aloud</a:t>
+            </a:r>
+            <a:endParaRPr lang="en-US" sz="1500" dirty="0"/>
           </a:p>
         </p:txBody>
       </p:sp>
@@ -3533,14 +3678,34 @@
       </p:grpSpPr>
       <p:sp>
         <p:nvSpPr>
-          <p:cNvPr id="2" name="Text 0"/>
-          <p:cNvSpPr/>
-          <p:nvPr/>
-        </p:nvSpPr>
-        <p:spPr>
-          <a:xfrm>
-            <a:off x="3657600" y="457200"/>
-            <a:ext cx="1828800" cy="731520"/>
+          <p:cNvPr id="2" name="Shape 0"/>
+          <p:cNvSpPr/>
+          <p:nvPr/>
+        </p:nvSpPr>
+        <p:spPr>
+          <a:xfrm>
+            <a:off x="0" y="0"/>
+            <a:ext cx="9144000" cy="566928"/>
+          </a:xfrm>
+          <a:prstGeom prst="rect">
+            <a:avLst/>
+          </a:prstGeom>
+          <a:solidFill>
+            <a:srgbClr val="55C8E8"/>
+          </a:solidFill>
+          <a:ln/>
+        </p:spPr>
+      </p:sp>
+      <p:sp>
+        <p:nvSpPr>
+          <p:cNvPr id="3" name="Text 1"/>
+          <p:cNvSpPr/>
+          <p:nvPr/>
+        </p:nvSpPr>
+        <p:spPr>
+          <a:xfrm>
+            <a:off x="365760" y="54864"/>
+            <a:ext cx="8412480" cy="457200"/>
           </a:xfrm>
           <a:prstGeom prst="rect">
             <a:avLst/>
@@ -3552,31 +3717,34 @@
           <a:bodyPr wrap="square" lIns="0" tIns="0" rIns="0" bIns="0" rtlCol="0" anchor="ctr"/>
           <a:lstStyle/>
           <a:p>
-            <a:pPr algn="ctr" indent="0" marL="0">
-              <a:buNone/>
-            </a:pPr>
-            <a:r>
-              <a:rPr lang="en-US" sz="4400" dirty="0">
-                <a:solidFill>
-                  <a:srgbClr val="000000"/>
-                </a:solidFill>
-              </a:rPr>
-              <a:t>🗣️</a:t>
-            </a:r>
-            <a:endParaRPr lang="en-US" sz="4400" dirty="0"/>
-          </a:p>
-        </p:txBody>
-      </p:sp>
-      <p:sp>
-        <p:nvSpPr>
-          <p:cNvPr id="3" name="Text 1"/>
-          <p:cNvSpPr/>
-          <p:nvPr/>
-        </p:nvSpPr>
-        <p:spPr>
-          <a:xfrm>
-            <a:off x="914400" y="1097280"/>
-            <a:ext cx="7315200" cy="640080"/>
+            <a:pPr indent="0" marL="0">
+              <a:buNone/>
+            </a:pPr>
+            <a:r>
+              <a:rPr lang="en-US" sz="2200" b="1" dirty="0">
+                <a:solidFill>
+                  <a:srgbClr val="FFFFFF"/>
+                </a:solidFill>
+                <a:latin typeface="Calibri" pitchFamily="34" charset="0"/>
+                <a:ea typeface="Calibri" pitchFamily="34" charset="-122"/>
+                <a:cs typeface="Calibri" pitchFamily="34" charset="-120"/>
+              </a:rPr>
+              <a:t>🗣️  Share Time</a:t>
+            </a:r>
+            <a:endParaRPr lang="en-US" sz="2200" dirty="0"/>
+          </a:p>
+        </p:txBody>
+      </p:sp>
+      <p:sp>
+        <p:nvSpPr>
+          <p:cNvPr id="4" name="Text 2"/>
+          <p:cNvSpPr/>
+          <p:nvPr/>
+        </p:nvSpPr>
+        <p:spPr>
+          <a:xfrm>
+            <a:off x="365760" y="1005840"/>
+            <a:ext cx="8412480" cy="548640"/>
           </a:xfrm>
           <a:prstGeom prst="rect">
             <a:avLst/>
@@ -3588,11 +3756,11 @@
           <a:bodyPr wrap="square" lIns="0" tIns="0" rIns="0" bIns="0" rtlCol="0" anchor="ctr"/>
           <a:lstStyle/>
           <a:p>
-            <a:pPr algn="ctr" indent="0" marL="0">
-              <a:buNone/>
-            </a:pPr>
-            <a:r>
-              <a:rPr lang="en-US" sz="3400" b="1" dirty="0">
+            <a:pPr indent="0" marL="0">
+              <a:buNone/>
+            </a:pPr>
+            <a:r>
+              <a:rPr lang="en-US" sz="2600" b="1" dirty="0">
                 <a:solidFill>
                   <a:srgbClr val="0E1C42"/>
                 </a:solidFill>
@@ -3600,22 +3768,22 @@
                 <a:ea typeface="Calibri" pitchFamily="34" charset="-122"/>
                 <a:cs typeface="Calibri" pitchFamily="34" charset="-120"/>
               </a:rPr>
-              <a:t>Share Time</a:t>
-            </a:r>
-            <a:endParaRPr lang="en-US" sz="3400" dirty="0"/>
-          </a:p>
-        </p:txBody>
-      </p:sp>
-      <p:sp>
-        <p:nvSpPr>
-          <p:cNvPr id="4" name="Text 2"/>
-          <p:cNvSpPr/>
-          <p:nvPr/>
-        </p:nvSpPr>
-        <p:spPr>
-          <a:xfrm>
-            <a:off x="914400" y="1737360"/>
-            <a:ext cx="7315200" cy="457200"/>
+              <a:t>3 minutes — let's hear your writing!</a:t>
+            </a:r>
+            <a:endParaRPr lang="en-US" sz="2600" dirty="0"/>
+          </a:p>
+        </p:txBody>
+      </p:sp>
+      <p:sp>
+        <p:nvSpPr>
+          <p:cNvPr id="5" name="Text 3"/>
+          <p:cNvSpPr/>
+          <p:nvPr/>
+        </p:nvSpPr>
+        <p:spPr>
+          <a:xfrm>
+            <a:off x="365760" y="1691640"/>
+            <a:ext cx="8412480" cy="457200"/>
           </a:xfrm>
           <a:prstGeom prst="rect">
             <a:avLst/>
@@ -3627,164 +3795,21 @@
           <a:bodyPr wrap="square" lIns="0" tIns="0" rIns="0" bIns="0" rtlCol="0" anchor="ctr"/>
           <a:lstStyle/>
           <a:p>
-            <a:pPr algn="ctr" indent="0" marL="0">
+            <a:pPr indent="0" marL="0">
               <a:buNone/>
             </a:pPr>
             <a:r>
               <a:rPr lang="en-US" sz="1700" dirty="0">
                 <a:solidFill>
-                  <a:srgbClr val="55C8E8"/>
-                </a:solidFill>
-                <a:latin typeface="Calibri" pitchFamily="34" charset="0"/>
-                <a:ea typeface="Calibri" pitchFamily="34" charset="-122"/>
-                <a:cs typeface="Calibri" pitchFamily="34" charset="-120"/>
-              </a:rPr>
-              <a:t>3 minutes — let's hear your writing!</a:t>
+                  <a:srgbClr val="1E293B"/>
+                </a:solidFill>
+                <a:latin typeface="Calibri" pitchFamily="34" charset="0"/>
+                <a:ea typeface="Calibri" pitchFamily="34" charset="-122"/>
+                <a:cs typeface="Calibri" pitchFamily="34" charset="-120"/>
+              </a:rPr>
+              <a:t>Raise your hand  ·  paste it in the chat  ·  or hold your paper up to the camera</a:t>
             </a:r>
             <a:endParaRPr lang="en-US" sz="1700" dirty="0"/>
-          </a:p>
-        </p:txBody>
-      </p:sp>
-      <p:sp>
-        <p:nvSpPr>
-          <p:cNvPr id="5" name="Shape 3"/>
-          <p:cNvSpPr/>
-          <p:nvPr/>
-        </p:nvSpPr>
-        <p:spPr>
-          <a:xfrm>
-            <a:off x="1828800" y="2468880"/>
-            <a:ext cx="5486400" cy="1645920"/>
-          </a:xfrm>
-          <a:prstGeom prst="roundRect">
-            <a:avLst>
-              <a:gd name="adj" fmla="val 6667"/>
-            </a:avLst>
-          </a:prstGeom>
-          <a:solidFill>
-            <a:srgbClr val="FFFFFF"/>
-          </a:solidFill>
-          <a:ln/>
-          <a:effectLst>
-            <a:outerShdw sx="100000" sy="100000" kx="0" ky="0" algn="bl" rotWithShape="0" blurRad="101600" dist="38100" dir="2700000">
-              <a:srgbClr val="000000">
-                <a:alpha val="12000"/>
-              </a:srgbClr>
-            </a:outerShdw>
-          </a:effectLst>
-        </p:spPr>
-      </p:sp>
-      <p:sp>
-        <p:nvSpPr>
-          <p:cNvPr id="6" name="Text 4"/>
-          <p:cNvSpPr/>
-          <p:nvPr/>
-        </p:nvSpPr>
-        <p:spPr>
-          <a:xfrm>
-            <a:off x="2103120" y="2560320"/>
-            <a:ext cx="4937760" cy="1463040"/>
-          </a:xfrm>
-          <a:prstGeom prst="rect">
-            <a:avLst/>
-          </a:prstGeom>
-          <a:noFill/>
-          <a:ln/>
-        </p:spPr>
-        <p:txBody>
-          <a:bodyPr wrap="square" lIns="0" tIns="0" rIns="0" bIns="0" rtlCol="0" anchor="t"/>
-          <a:lstStyle/>
-          <a:p>
-            <a:pPr indent="0" marL="0">
-              <a:spcAft>
-                <a:spcPts val="200"/>
-              </a:spcAft>
-              <a:buNone/>
-            </a:pPr>
-            <a:r>
-              <a:rPr lang="en-US" sz="1400" b="1" dirty="0">
-                <a:solidFill>
-                  <a:srgbClr val="0E1C42"/>
-                </a:solidFill>
-                <a:latin typeface="Calibri" pitchFamily="34" charset="0"/>
-                <a:ea typeface="Calibri" pitchFamily="34" charset="-122"/>
-                <a:cs typeface="Calibri" pitchFamily="34" charset="-120"/>
-              </a:rPr>
-              <a:t>How to share:
-</a:t>
-            </a:r>
-            <a:pPr indent="0" marL="0">
-              <a:spcAft>
-                <a:spcPts val="200"/>
-              </a:spcAft>
-              <a:buNone/>
-            </a:pPr>
-            <a:r>
-              <a:rPr lang="en-US" sz="1300" dirty="0">
-                <a:solidFill>
-                  <a:srgbClr val="1E293B"/>
-                </a:solidFill>
-                <a:latin typeface="Calibri" pitchFamily="34" charset="0"/>
-                <a:ea typeface="Calibri" pitchFamily="34" charset="-122"/>
-                <a:cs typeface="Calibri" pitchFamily="34" charset="-120"/>
-              </a:rPr>
-              <a:t>✋ Raise your hand if you want to read yours aloud
-</a:t>
-            </a:r>
-            <a:pPr indent="0" marL="0">
-              <a:spcAft>
-                <a:spcPts val="200"/>
-              </a:spcAft>
-              <a:buNone/>
-            </a:pPr>
-            <a:r>
-              <a:rPr lang="en-US" sz="1300" dirty="0">
-                <a:solidFill>
-                  <a:srgbClr val="1E293B"/>
-                </a:solidFill>
-                <a:latin typeface="Calibri" pitchFamily="34" charset="0"/>
-                <a:ea typeface="Calibri" pitchFamily="34" charset="-122"/>
-                <a:cs typeface="Calibri" pitchFamily="34" charset="-120"/>
-              </a:rPr>
-              <a:t>💬 Or paste your writing in the chat
-</a:t>
-            </a:r>
-            <a:pPr indent="0" marL="0">
-              <a:spcAft>
-                <a:spcPts val="200"/>
-              </a:spcAft>
-              <a:buNone/>
-            </a:pPr>
-            <a:r>
-              <a:rPr lang="en-US" sz="1300" dirty="0">
-                <a:solidFill>
-                  <a:srgbClr val="1E293B"/>
-                </a:solidFill>
-                <a:latin typeface="Calibri" pitchFamily="34" charset="0"/>
-                <a:ea typeface="Calibri" pitchFamily="34" charset="-122"/>
-                <a:cs typeface="Calibri" pitchFamily="34" charset="-120"/>
-              </a:rPr>
-              <a:t>👂 Listen respectfully when others share
-</a:t>
-            </a:r>
-            <a:pPr indent="0" marL="0">
-              <a:spcAft>
-                <a:spcPts val="200"/>
-              </a:spcAft>
-              <a:buNone/>
-            </a:pPr>
-            <a:r>
-              <a:rPr lang="en-US" sz="1200" i="1" dirty="0">
-                <a:solidFill>
-                  <a:srgbClr val="64748B"/>
-                </a:solidFill>
-                <a:latin typeface="Calibri" pitchFamily="34" charset="0"/>
-                <a:ea typeface="Calibri" pitchFamily="34" charset="-122"/>
-                <a:cs typeface="Calibri" pitchFamily="34" charset="-120"/>
-              </a:rPr>
-              <a:t>Every writer's ideas matter — there are no wrong answers.</a:t>
-            </a:r>
-            <a:endParaRPr lang="en-US" sz="1400" dirty="0"/>
           </a:p>
         </p:txBody>
       </p:sp>
@@ -3802,7 +3827,7 @@
     <p:bg>
       <p:bgPr>
         <a:solidFill>
-          <a:srgbClr val="E5F7FC"/>
+          <a:srgbClr val="F8FAFC"/>
         </a:solidFill>
       </p:bgPr>
     </p:bg>
@@ -3822,14 +3847,34 @@
       </p:grpSpPr>
       <p:sp>
         <p:nvSpPr>
-          <p:cNvPr id="2" name="Text 0"/>
-          <p:cNvSpPr/>
-          <p:nvPr/>
-        </p:nvSpPr>
-        <p:spPr>
-          <a:xfrm>
-            <a:off x="365760" y="164592"/>
-            <a:ext cx="5943600" cy="566928"/>
+          <p:cNvPr id="2" name="Shape 0"/>
+          <p:cNvSpPr/>
+          <p:nvPr/>
+        </p:nvSpPr>
+        <p:spPr>
+          <a:xfrm>
+            <a:off x="0" y="0"/>
+            <a:ext cx="9144000" cy="566928"/>
+          </a:xfrm>
+          <a:prstGeom prst="rect">
+            <a:avLst/>
+          </a:prstGeom>
+          <a:solidFill>
+            <a:srgbClr val="34B76F"/>
+          </a:solidFill>
+          <a:ln/>
+        </p:spPr>
+      </p:sp>
+      <p:sp>
+        <p:nvSpPr>
+          <p:cNvPr id="3" name="Text 1"/>
+          <p:cNvSpPr/>
+          <p:nvPr/>
+        </p:nvSpPr>
+        <p:spPr>
+          <a:xfrm>
+            <a:off x="365760" y="54864"/>
+            <a:ext cx="8412480" cy="457200"/>
           </a:xfrm>
           <a:prstGeom prst="rect">
             <a:avLst/>
@@ -3841,11 +3886,89 @@
           <a:bodyPr wrap="square" lIns="0" tIns="0" rIns="0" bIns="0" rtlCol="0" anchor="ctr"/>
           <a:lstStyle/>
           <a:p>
-            <a:pPr algn="l" indent="0" marL="0">
-              <a:buNone/>
-            </a:pPr>
-            <a:r>
-              <a:rPr lang="en-US" sz="2800" b="1" dirty="0">
+            <a:pPr indent="0" marL="0">
+              <a:buNone/>
+            </a:pPr>
+            <a:r>
+              <a:rPr lang="en-US" sz="2200" b="1" dirty="0">
+                <a:solidFill>
+                  <a:srgbClr val="FFFFFF"/>
+                </a:solidFill>
+                <a:latin typeface="Calibri" pitchFamily="34" charset="0"/>
+                <a:ea typeface="Calibri" pitchFamily="34" charset="-122"/>
+                <a:cs typeface="Calibri" pitchFamily="34" charset="-120"/>
+              </a:rPr>
+              <a:t>📖  Today</a:t>
+            </a:r>
+            <a:endParaRPr lang="en-US" sz="2200" dirty="0"/>
+          </a:p>
+        </p:txBody>
+      </p:sp>
+      <p:sp>
+        <p:nvSpPr>
+          <p:cNvPr id="4" name="Text 2"/>
+          <p:cNvSpPr/>
+          <p:nvPr/>
+        </p:nvSpPr>
+        <p:spPr>
+          <a:xfrm>
+            <a:off x="365760" y="777240"/>
+            <a:ext cx="8229600" cy="237744"/>
+          </a:xfrm>
+          <a:prstGeom prst="rect">
+            <a:avLst/>
+          </a:prstGeom>
+          <a:noFill/>
+          <a:ln/>
+        </p:spPr>
+        <p:txBody>
+          <a:bodyPr wrap="square" lIns="0" tIns="0" rIns="0" bIns="0" rtlCol="0" anchor="ctr"/>
+          <a:lstStyle/>
+          <a:p>
+            <a:pPr indent="0" marL="0">
+              <a:buNone/>
+            </a:pPr>
+            <a:r>
+              <a:rPr lang="en-US" sz="1100" b="1" spc="100" kern="0" dirty="0">
+                <a:solidFill>
+                  <a:srgbClr val="8B6FC0"/>
+                </a:solidFill>
+                <a:latin typeface="Calibri" pitchFamily="34" charset="0"/>
+                <a:ea typeface="Calibri" pitchFamily="34" charset="-122"/>
+                <a:cs typeface="Calibri" pitchFamily="34" charset="-120"/>
+              </a:rPr>
+              <a:t>READING</a:t>
+            </a:r>
+            <a:endParaRPr lang="en-US" sz="1100" dirty="0"/>
+          </a:p>
+        </p:txBody>
+      </p:sp>
+      <p:sp>
+        <p:nvSpPr>
+          <p:cNvPr id="5" name="Text 3"/>
+          <p:cNvSpPr/>
+          <p:nvPr/>
+        </p:nvSpPr>
+        <p:spPr>
+          <a:xfrm>
+            <a:off x="365760" y="1014984"/>
+            <a:ext cx="8412480" cy="365760"/>
+          </a:xfrm>
+          <a:prstGeom prst="rect">
+            <a:avLst/>
+          </a:prstGeom>
+          <a:noFill/>
+          <a:ln/>
+        </p:spPr>
+        <p:txBody>
+          <a:bodyPr wrap="square" lIns="0" tIns="0" rIns="0" bIns="0" rtlCol="0" anchor="ctr"/>
+          <a:lstStyle/>
+          <a:p>
+            <a:pPr indent="0" marL="0">
+              <a:buNone/>
+            </a:pPr>
+            <a:r>
+              <a:rPr lang="en-US" sz="2000" b="1" dirty="0">
                 <a:solidFill>
                   <a:srgbClr val="0E1C42"/>
                 </a:solidFill>
@@ -3853,155 +3976,71 @@
                 <a:ea typeface="Calibri" pitchFamily="34" charset="-122"/>
                 <a:cs typeface="Calibri" pitchFamily="34" charset="-120"/>
               </a:rPr>
-              <a:t>💡 Today's Focus</a:t>
-            </a:r>
-            <a:endParaRPr lang="en-US" sz="2800" dirty="0"/>
-          </a:p>
-        </p:txBody>
-      </p:sp>
-      <p:sp>
-        <p:nvSpPr>
-          <p:cNvPr id="3" name="Shape 1"/>
-          <p:cNvSpPr/>
-          <p:nvPr/>
-        </p:nvSpPr>
-        <p:spPr>
-          <a:xfrm>
-            <a:off x="365760" y="749808"/>
-            <a:ext cx="8412480" cy="0"/>
-          </a:xfrm>
-          <a:prstGeom prst="line">
-            <a:avLst/>
-          </a:prstGeom>
-          <a:noFill/>
-          <a:ln w="19050">
-            <a:solidFill>
-              <a:srgbClr val="E67E22"/>
-            </a:solidFill>
-            <a:prstDash val="solid"/>
-          </a:ln>
-        </p:spPr>
-      </p:sp>
-      <p:sp>
-        <p:nvSpPr>
-          <p:cNvPr id="4" name="Shape 2"/>
-          <p:cNvSpPr/>
-          <p:nvPr/>
-        </p:nvSpPr>
-        <p:spPr>
-          <a:xfrm>
-            <a:off x="6492240" y="173736"/>
-            <a:ext cx="2286000" cy="502920"/>
+              <a:t>Reading: Week 32</a:t>
+            </a:r>
+            <a:endParaRPr lang="en-US" sz="2000" dirty="0"/>
+          </a:p>
+        </p:txBody>
+      </p:sp>
+      <p:sp>
+        <p:nvSpPr>
+          <p:cNvPr id="6" name="Text 4"/>
+          <p:cNvSpPr/>
+          <p:nvPr/>
+        </p:nvSpPr>
+        <p:spPr>
+          <a:xfrm>
+            <a:off x="365760" y="1508760"/>
+            <a:ext cx="8229600" cy="237744"/>
+          </a:xfrm>
+          <a:prstGeom prst="rect">
+            <a:avLst/>
+          </a:prstGeom>
+          <a:noFill/>
+          <a:ln/>
+        </p:spPr>
+        <p:txBody>
+          <a:bodyPr wrap="square" lIns="0" tIns="0" rIns="0" bIns="0" rtlCol="0" anchor="ctr"/>
+          <a:lstStyle/>
+          <a:p>
+            <a:pPr indent="0" marL="0">
+              <a:buNone/>
+            </a:pPr>
+            <a:r>
+              <a:rPr lang="en-US" sz="1100" b="1" spc="100" kern="0" dirty="0">
+                <a:solidFill>
+                  <a:srgbClr val="C7922C"/>
+                </a:solidFill>
+                <a:latin typeface="Calibri" pitchFamily="34" charset="0"/>
+                <a:ea typeface="Calibri" pitchFamily="34" charset="-122"/>
+                <a:cs typeface="Calibri" pitchFamily="34" charset="-120"/>
+              </a:rPr>
+              <a:t>BIG QUESTION</a:t>
+            </a:r>
+            <a:endParaRPr lang="en-US" sz="1100" dirty="0"/>
+          </a:p>
+        </p:txBody>
+      </p:sp>
+      <p:sp>
+        <p:nvSpPr>
+          <p:cNvPr id="7" name="Shape 5"/>
+          <p:cNvSpPr/>
+          <p:nvPr/>
+        </p:nvSpPr>
+        <p:spPr>
+          <a:xfrm>
+            <a:off x="365760" y="1746504"/>
+            <a:ext cx="8412480" cy="731520"/>
           </a:xfrm>
           <a:prstGeom prst="roundRect">
             <a:avLst>
-              <a:gd name="adj" fmla="val 21818"/>
-            </a:avLst>
-          </a:prstGeom>
-          <a:solidFill>
-            <a:srgbClr val="E67E22"/>
-          </a:solidFill>
-          <a:ln/>
-        </p:spPr>
-      </p:sp>
-      <p:sp>
-        <p:nvSpPr>
-          <p:cNvPr id="5" name="Text 3"/>
-          <p:cNvSpPr/>
-          <p:nvPr/>
-        </p:nvSpPr>
-        <p:spPr>
-          <a:xfrm>
-            <a:off x="6492240" y="173736"/>
-            <a:ext cx="2286000" cy="502920"/>
-          </a:xfrm>
-          <a:prstGeom prst="rect">
-            <a:avLst/>
-          </a:prstGeom>
-          <a:noFill/>
-          <a:ln/>
-        </p:spPr>
-        <p:txBody>
-          <a:bodyPr wrap="square" lIns="0" tIns="0" rIns="0" bIns="0" rtlCol="0" anchor="ctr"/>
-          <a:lstStyle/>
-          <a:p>
-            <a:pPr algn="ctr" indent="0" marL="0">
-              <a:buNone/>
-            </a:pPr>
-            <a:r>
-              <a:rPr lang="en-US" sz="1100" b="1" dirty="0">
-                <a:solidFill>
-                  <a:srgbClr val="0E1C42"/>
-                </a:solidFill>
-                <a:latin typeface="Calibri" pitchFamily="34" charset="0"/>
-                <a:ea typeface="Calibri" pitchFamily="34" charset="-122"/>
-                <a:cs typeface="Calibri" pitchFamily="34" charset="-120"/>
-              </a:rPr>
-              <a:t>CHAT PROMPT</a:t>
-            </a:r>
-            <a:endParaRPr lang="en-US" sz="1100" dirty="0"/>
-          </a:p>
-        </p:txBody>
-      </p:sp>
-      <p:sp>
-        <p:nvSpPr>
-          <p:cNvPr id="6" name="Text 4"/>
-          <p:cNvSpPr/>
-          <p:nvPr/>
-        </p:nvSpPr>
-        <p:spPr>
-          <a:xfrm>
-            <a:off x="457200" y="914400"/>
-            <a:ext cx="8046720" cy="292608"/>
-          </a:xfrm>
-          <a:prstGeom prst="rect">
-            <a:avLst/>
-          </a:prstGeom>
-          <a:noFill/>
-          <a:ln/>
-        </p:spPr>
-        <p:txBody>
-          <a:bodyPr wrap="square" lIns="0" tIns="0" rIns="0" bIns="0" rtlCol="0" anchor="ctr"/>
-          <a:lstStyle/>
-          <a:p>
-            <a:pPr indent="0" marL="0">
-              <a:buNone/>
-            </a:pPr>
-            <a:r>
-              <a:rPr lang="en-US" sz="1100" b="1" spc="200" kern="0" dirty="0">
-                <a:solidFill>
-                  <a:srgbClr val="C7922C"/>
-                </a:solidFill>
-                <a:latin typeface="Calibri" pitchFamily="34" charset="0"/>
-                <a:ea typeface="Calibri" pitchFamily="34" charset="-122"/>
-                <a:cs typeface="Calibri" pitchFamily="34" charset="-120"/>
-              </a:rPr>
-              <a:t>BIG QUESTION</a:t>
-            </a:r>
-            <a:endParaRPr lang="en-US" sz="1100" dirty="0"/>
-          </a:p>
-        </p:txBody>
-      </p:sp>
-      <p:sp>
-        <p:nvSpPr>
-          <p:cNvPr id="7" name="Shape 5"/>
-          <p:cNvSpPr/>
-          <p:nvPr/>
-        </p:nvSpPr>
-        <p:spPr>
-          <a:xfrm>
-            <a:off x="457200" y="1234440"/>
-            <a:ext cx="8229600" cy="640080"/>
-          </a:xfrm>
-          <a:prstGeom prst="roundRect">
-            <a:avLst>
-              <a:gd name="adj" fmla="val 14286"/>
+              <a:gd name="adj" fmla="val 12500"/>
             </a:avLst>
           </a:prstGeom>
           <a:solidFill>
             <a:srgbClr val="FEF6E8"/>
           </a:solidFill>
-          <a:ln w="12700">
+          <a:ln w="19050">
             <a:solidFill>
               <a:srgbClr val="C7922C"/>
             </a:solidFill>
@@ -4024,8 +4063,8 @@
         </p:nvSpPr>
         <p:spPr>
           <a:xfrm>
-            <a:off x="640080" y="1344168"/>
-            <a:ext cx="7863840" cy="411480"/>
+            <a:off x="594360" y="1874520"/>
+            <a:ext cx="7955280" cy="475488"/>
           </a:xfrm>
           <a:prstGeom prst="rect">
             <a:avLst/>
@@ -4041,7 +4080,7 @@
               <a:buNone/>
             </a:pPr>
             <a:r>
-              <a:rPr lang="en-US" sz="1800" i="1" dirty="0">
+              <a:rPr lang="en-US" sz="1700" dirty="0">
                 <a:solidFill>
                   <a:srgbClr val="1E293B"/>
                 </a:solidFill>
@@ -4051,43 +4090,48 @@
               </a:rPr>
               <a:t>Reflect on how reading skills have grown.</a:t>
             </a:r>
-            <a:endParaRPr lang="en-US" sz="1800" dirty="0"/>
-          </a:p>
-        </p:txBody>
-      </p:sp>
-      <p:sp>
-        <p:nvSpPr>
-          <p:cNvPr id="9" name="Shape 7"/>
-          <p:cNvSpPr/>
-          <p:nvPr/>
-        </p:nvSpPr>
-        <p:spPr>
-          <a:xfrm>
-            <a:off x="457200" y="1965960"/>
-            <a:ext cx="8229600" cy="640080"/>
-          </a:xfrm>
-          <a:prstGeom prst="roundRect">
-            <a:avLst>
-              <a:gd name="adj" fmla="val 14286"/>
-            </a:avLst>
-          </a:prstGeom>
-          <a:solidFill>
-            <a:srgbClr val="FEF6E8"/>
-          </a:solidFill>
-          <a:ln w="12700">
-            <a:solidFill>
-              <a:srgbClr val="C7922C"/>
-            </a:solidFill>
-            <a:prstDash val="solid"/>
-          </a:ln>
-          <a:effectLst>
-            <a:outerShdw sx="100000" sy="100000" kx="0" ky="0" algn="bl" rotWithShape="0" blurRad="101600" dist="38100" dir="2700000">
-              <a:srgbClr val="000000">
-                <a:alpha val="12000"/>
-              </a:srgbClr>
-            </a:outerShdw>
-          </a:effectLst>
-        </p:spPr>
+            <a:endParaRPr lang="en-US" sz="1700" dirty="0"/>
+          </a:p>
+        </p:txBody>
+      </p:sp>
+      <p:sp>
+        <p:nvSpPr>
+          <p:cNvPr id="9" name="Text 7"/>
+          <p:cNvSpPr/>
+          <p:nvPr/>
+        </p:nvSpPr>
+        <p:spPr>
+          <a:xfrm>
+            <a:off x="365760" y="2606040"/>
+            <a:ext cx="8229600" cy="237744"/>
+          </a:xfrm>
+          <a:prstGeom prst="rect">
+            <a:avLst/>
+          </a:prstGeom>
+          <a:noFill/>
+          <a:ln/>
+        </p:spPr>
+        <p:txBody>
+          <a:bodyPr wrap="square" lIns="0" tIns="0" rIns="0" bIns="0" rtlCol="0" anchor="ctr"/>
+          <a:lstStyle/>
+          <a:p>
+            <a:pPr indent="0" marL="0">
+              <a:buNone/>
+            </a:pPr>
+            <a:r>
+              <a:rPr lang="en-US" sz="1100" b="1" spc="100" kern="0" dirty="0">
+                <a:solidFill>
+                  <a:srgbClr val="55C8E8"/>
+                </a:solidFill>
+                <a:latin typeface="Calibri" pitchFamily="34" charset="0"/>
+                <a:ea typeface="Calibri" pitchFamily="34" charset="-122"/>
+                <a:cs typeface="Calibri" pitchFamily="34" charset="-120"/>
+              </a:rPr>
+              <a:t>READING LENS</a:t>
+            </a:r>
+            <a:endParaRPr lang="en-US" sz="1100" dirty="0"/>
+          </a:p>
+        </p:txBody>
       </p:sp>
       <p:sp>
         <p:nvSpPr>
@@ -4097,159 +4141,8 @@
         </p:nvSpPr>
         <p:spPr>
           <a:xfrm>
-            <a:off x="640080" y="2075688"/>
-            <a:ext cx="7863840" cy="411480"/>
-          </a:xfrm>
-          <a:prstGeom prst="rect">
-            <a:avLst/>
-          </a:prstGeom>
-          <a:noFill/>
-          <a:ln/>
-        </p:spPr>
-        <p:txBody>
-          <a:bodyPr wrap="square" lIns="0" tIns="0" rIns="0" bIns="0" rtlCol="0" anchor="ctr"/>
-          <a:lstStyle/>
-          <a:p>
-            <a:pPr indent="0" marL="0">
-              <a:buNone/>
-            </a:pPr>
-            <a:r>
-              <a:rPr lang="en-US" sz="1800" i="1" dirty="0">
-                <a:solidFill>
-                  <a:srgbClr val="1E293B"/>
-                </a:solidFill>
-                <a:latin typeface="Calibri" pitchFamily="34" charset="0"/>
-                <a:ea typeface="Calibri" pitchFamily="34" charset="-122"/>
-                <a:cs typeface="Calibri" pitchFamily="34" charset="-120"/>
-              </a:rPr>
-              <a:t>As you read today, ask yourself: What makes the difference between a good response and a truly memorable one?</a:t>
-            </a:r>
-            <a:endParaRPr lang="en-US" sz="1800" dirty="0"/>
-          </a:p>
-        </p:txBody>
-      </p:sp>
-      <p:sp>
-        <p:nvSpPr>
-          <p:cNvPr id="11" name="Shape 9"/>
-          <p:cNvSpPr/>
-          <p:nvPr/>
-        </p:nvSpPr>
-        <p:spPr>
-          <a:xfrm>
-            <a:off x="457200" y="2697480"/>
-            <a:ext cx="8229600" cy="640080"/>
-          </a:xfrm>
-          <a:prstGeom prst="roundRect">
-            <a:avLst>
-              <a:gd name="adj" fmla="val 14286"/>
-            </a:avLst>
-          </a:prstGeom>
-          <a:solidFill>
-            <a:srgbClr val="FEF6E8"/>
-          </a:solidFill>
-          <a:ln w="12700">
-            <a:solidFill>
-              <a:srgbClr val="C7922C"/>
-            </a:solidFill>
-            <a:prstDash val="solid"/>
-          </a:ln>
-          <a:effectLst>
-            <a:outerShdw sx="100000" sy="100000" kx="0" ky="0" algn="bl" rotWithShape="0" blurRad="101600" dist="38100" dir="2700000">
-              <a:srgbClr val="000000">
-                <a:alpha val="12000"/>
-              </a:srgbClr>
-            </a:outerShdw>
-          </a:effectLst>
-        </p:spPr>
-      </p:sp>
-      <p:sp>
-        <p:nvSpPr>
-          <p:cNvPr id="12" name="Text 10"/>
-          <p:cNvSpPr/>
-          <p:nvPr/>
-        </p:nvSpPr>
-        <p:spPr>
-          <a:xfrm>
-            <a:off x="640080" y="2807208"/>
-            <a:ext cx="7863840" cy="411480"/>
-          </a:xfrm>
-          <a:prstGeom prst="rect">
-            <a:avLst/>
-          </a:prstGeom>
-          <a:noFill/>
-          <a:ln/>
-        </p:spPr>
-        <p:txBody>
-          <a:bodyPr wrap="square" lIns="0" tIns="0" rIns="0" bIns="0" rtlCol="0" anchor="ctr"/>
-          <a:lstStyle/>
-          <a:p>
-            <a:pPr indent="0" marL="0">
-              <a:buNone/>
-            </a:pPr>
-            <a:r>
-              <a:rPr lang="en-US" sz="1800" i="1" dirty="0">
-                <a:solidFill>
-                  <a:srgbClr val="1E293B"/>
-                </a:solidFill>
-                <a:latin typeface="Calibri" pitchFamily="34" charset="0"/>
-                <a:ea typeface="Calibri" pitchFamily="34" charset="-122"/>
-                <a:cs typeface="Calibri" pitchFamily="34" charset="-120"/>
-              </a:rPr>
-              <a:t>Re-read your opening paragraph. Does it name your character, their novel, and your claim? Revise it so all three are present and clear.</a:t>
-            </a:r>
-            <a:endParaRPr lang="en-US" sz="1800" dirty="0"/>
-          </a:p>
-        </p:txBody>
-      </p:sp>
-      <p:sp>
-        <p:nvSpPr>
-          <p:cNvPr id="13" name="Text 11"/>
-          <p:cNvSpPr/>
-          <p:nvPr/>
-        </p:nvSpPr>
-        <p:spPr>
-          <a:xfrm>
-            <a:off x="457200" y="3429000"/>
-            <a:ext cx="8046720" cy="292608"/>
-          </a:xfrm>
-          <a:prstGeom prst="rect">
-            <a:avLst/>
-          </a:prstGeom>
-          <a:noFill/>
-          <a:ln/>
-        </p:spPr>
-        <p:txBody>
-          <a:bodyPr wrap="square" lIns="0" tIns="0" rIns="0" bIns="0" rtlCol="0" anchor="ctr"/>
-          <a:lstStyle/>
-          <a:p>
-            <a:pPr indent="0" marL="0">
-              <a:buNone/>
-            </a:pPr>
-            <a:r>
-              <a:rPr lang="en-US" sz="1100" b="1" spc="200" kern="0" dirty="0">
-                <a:solidFill>
-                  <a:srgbClr val="8B6FC0"/>
-                </a:solidFill>
-                <a:latin typeface="Calibri" pitchFamily="34" charset="0"/>
-                <a:ea typeface="Calibri" pitchFamily="34" charset="-122"/>
-                <a:cs typeface="Calibri" pitchFamily="34" charset="-120"/>
-              </a:rPr>
-              <a:t>READING LENS</a:t>
-            </a:r>
-            <a:endParaRPr lang="en-US" sz="1100" dirty="0"/>
-          </a:p>
-        </p:txBody>
-      </p:sp>
-      <p:sp>
-        <p:nvSpPr>
-          <p:cNvPr id="14" name="Text 12"/>
-          <p:cNvSpPr/>
-          <p:nvPr/>
-        </p:nvSpPr>
-        <p:spPr>
-          <a:xfrm>
-            <a:off x="640080" y="3749040"/>
-            <a:ext cx="7863840" cy="731520"/>
+            <a:off x="365760" y="2843784"/>
+            <a:ext cx="8412480" cy="914400"/>
           </a:xfrm>
           <a:prstGeom prst="rect">
             <a:avLst/>
@@ -4313,14 +4206,34 @@
       </p:grpSpPr>
       <p:sp>
         <p:nvSpPr>
-          <p:cNvPr id="2" name="Text 0"/>
-          <p:cNvSpPr/>
-          <p:nvPr/>
-        </p:nvSpPr>
-        <p:spPr>
-          <a:xfrm>
-            <a:off x="365760" y="164592"/>
-            <a:ext cx="8412480" cy="566928"/>
+          <p:cNvPr id="2" name="Shape 0"/>
+          <p:cNvSpPr/>
+          <p:nvPr/>
+        </p:nvSpPr>
+        <p:spPr>
+          <a:xfrm>
+            <a:off x="0" y="0"/>
+            <a:ext cx="9144000" cy="566928"/>
+          </a:xfrm>
+          <a:prstGeom prst="rect">
+            <a:avLst/>
+          </a:prstGeom>
+          <a:solidFill>
+            <a:srgbClr val="55C8E8"/>
+          </a:solidFill>
+          <a:ln/>
+        </p:spPr>
+      </p:sp>
+      <p:sp>
+        <p:nvSpPr>
+          <p:cNvPr id="3" name="Text 1"/>
+          <p:cNvSpPr/>
+          <p:nvPr/>
+        </p:nvSpPr>
+        <p:spPr>
+          <a:xfrm>
+            <a:off x="365760" y="54864"/>
+            <a:ext cx="8412480" cy="457200"/>
           </a:xfrm>
           <a:prstGeom prst="rect">
             <a:avLst/>
@@ -4332,46 +4245,23 @@
           <a:bodyPr wrap="square" lIns="0" tIns="0" rIns="0" bIns="0" rtlCol="0" anchor="ctr"/>
           <a:lstStyle/>
           <a:p>
-            <a:pPr algn="l" indent="0" marL="0">
-              <a:buNone/>
-            </a:pPr>
-            <a:r>
-              <a:rPr lang="en-US" sz="2800" b="1" dirty="0">
-                <a:solidFill>
-                  <a:srgbClr val="0E1C42"/>
-                </a:solidFill>
-                <a:latin typeface="Calibri" pitchFamily="34" charset="0"/>
-                <a:ea typeface="Calibri" pitchFamily="34" charset="-122"/>
-                <a:cs typeface="Calibri" pitchFamily="34" charset="-120"/>
-              </a:rPr>
-              <a:t>✅ Model Sentence — Study What's Right</a:t>
-            </a:r>
-            <a:endParaRPr lang="en-US" sz="2800" dirty="0"/>
-          </a:p>
-        </p:txBody>
-      </p:sp>
-      <p:sp>
-        <p:nvSpPr>
-          <p:cNvPr id="3" name="Shape 1"/>
-          <p:cNvSpPr/>
-          <p:nvPr/>
-        </p:nvSpPr>
-        <p:spPr>
-          <a:xfrm>
-            <a:off x="365760" y="749808"/>
-            <a:ext cx="8412480" cy="0"/>
-          </a:xfrm>
-          <a:prstGeom prst="line">
-            <a:avLst/>
-          </a:prstGeom>
-          <a:noFill/>
-          <a:ln w="19050">
-            <a:solidFill>
-              <a:srgbClr val="34B76F"/>
-            </a:solidFill>
-            <a:prstDash val="solid"/>
-          </a:ln>
-        </p:spPr>
+            <a:pPr indent="0" marL="0">
+              <a:buNone/>
+            </a:pPr>
+            <a:r>
+              <a:rPr lang="en-US" sz="2200" b="1" dirty="0">
+                <a:solidFill>
+                  <a:srgbClr val="FFFFFF"/>
+                </a:solidFill>
+                <a:latin typeface="Calibri" pitchFamily="34" charset="0"/>
+                <a:ea typeface="Calibri" pitchFamily="34" charset="-122"/>
+                <a:cs typeface="Calibri" pitchFamily="34" charset="-120"/>
+              </a:rPr>
+              <a:t>✏️  Daily Oral Language</a:t>
+            </a:r>
+            <a:endParaRPr lang="en-US" sz="2200" dirty="0"/>
+          </a:p>
+        </p:txBody>
       </p:sp>
       <p:sp>
         <p:nvSpPr>
@@ -4381,8 +4271,8 @@
         </p:nvSpPr>
         <p:spPr>
           <a:xfrm>
-            <a:off x="457200" y="1005840"/>
-            <a:ext cx="8046720" cy="292608"/>
+            <a:off x="365760" y="804672"/>
+            <a:ext cx="8229600" cy="237744"/>
           </a:xfrm>
           <a:prstGeom prst="rect">
             <a:avLst/>
@@ -4398,15 +4288,15 @@
               <a:buNone/>
             </a:pPr>
             <a:r>
-              <a:rPr lang="en-US" sz="1100" b="1" spc="200" kern="0" dirty="0">
-                <a:solidFill>
-                  <a:srgbClr val="34B76F"/>
-                </a:solidFill>
-                <a:latin typeface="Calibri" pitchFamily="34" charset="0"/>
-                <a:ea typeface="Calibri" pitchFamily="34" charset="-122"/>
-                <a:cs typeface="Calibri" pitchFamily="34" charset="-120"/>
-              </a:rPr>
-              <a:t>KEY GRAMMAR POINTS</a:t>
+              <a:rPr lang="en-US" sz="1100" b="1" spc="100" kern="0" dirty="0">
+                <a:solidFill>
+                  <a:srgbClr val="55C8E8"/>
+                </a:solidFill>
+                <a:latin typeface="Calibri" pitchFamily="34" charset="0"/>
+                <a:ea typeface="Calibri" pitchFamily="34" charset="-122"/>
+                <a:cs typeface="Calibri" pitchFamily="34" charset="-120"/>
+              </a:rPr>
+              <a:t>KEY GRAMMAR POINTS IN THE MODEL</a:t>
             </a:r>
             <a:endParaRPr lang="en-US" sz="1100" dirty="0"/>
           </a:p>
@@ -4420,16 +4310,16 @@
         </p:nvSpPr>
         <p:spPr>
           <a:xfrm>
-            <a:off x="457200" y="1371600"/>
-            <a:ext cx="8229600" cy="475488"/>
+            <a:off x="365760" y="1097280"/>
+            <a:ext cx="8412480" cy="548640"/>
           </a:xfrm>
           <a:prstGeom prst="roundRect">
             <a:avLst>
-              <a:gd name="adj" fmla="val 19231"/>
+              <a:gd name="adj" fmla="val 16667"/>
             </a:avLst>
           </a:prstGeom>
           <a:solidFill>
-            <a:srgbClr val="E8F8EF"/>
+            <a:srgbClr val="F8FAFC"/>
           </a:solidFill>
           <a:ln/>
           <a:effectLst>
@@ -4449,7 +4339,7 @@
         </p:nvSpPr>
         <p:spPr>
           <a:xfrm>
-            <a:off x="640080" y="1426464"/>
+            <a:off x="594360" y="1188720"/>
             <a:ext cx="7863840" cy="365760"/>
           </a:xfrm>
           <a:prstGeom prst="rect">
@@ -4466,7 +4356,7 @@
               <a:buNone/>
             </a:pPr>
             <a:r>
-              <a:rPr lang="en-US" sz="1600" b="1" dirty="0">
+              <a:rPr lang="en-US" sz="1500" b="1" dirty="0">
                 <a:solidFill>
                   <a:srgbClr val="0E1C42"/>
                 </a:solidFill>
@@ -4474,7 +4364,7 @@
                 <a:ea typeface="Calibri" pitchFamily="34" charset="-122"/>
                 <a:cs typeface="Calibri" pitchFamily="34" charset="-120"/>
               </a:rPr>
-              <a:t>greatest</a:t>
+              <a:t>greatest  </a:t>
             </a:r>
             <a:pPr indent="0" marL="0">
               <a:buNone/>
@@ -4482,15 +4372,15 @@
             <a:r>
               <a:rPr lang="en-US" sz="1300" dirty="0">
                 <a:solidFill>
-                  <a:srgbClr val="64748B"/>
-                </a:solidFill>
-                <a:latin typeface="Calibri" pitchFamily="34" charset="0"/>
-                <a:ea typeface="Calibri" pitchFamily="34" charset="-122"/>
-                <a:cs typeface="Calibri" pitchFamily="34" charset="-120"/>
-              </a:rPr>
-              <a:t>  —  Superlative adjective — the most great.</a:t>
-            </a:r>
-            <a:endParaRPr lang="en-US" sz="1600" dirty="0"/>
+                  <a:srgbClr val="1E293B"/>
+                </a:solidFill>
+                <a:latin typeface="Calibri" pitchFamily="34" charset="0"/>
+                <a:ea typeface="Calibri" pitchFamily="34" charset="-122"/>
+                <a:cs typeface="Calibri" pitchFamily="34" charset="-120"/>
+              </a:rPr>
+              <a:t>Superlative adjective — the most great.</a:t>
+            </a:r>
+            <a:endParaRPr lang="en-US" sz="1500" dirty="0"/>
           </a:p>
         </p:txBody>
       </p:sp>
@@ -4502,16 +4392,16 @@
         </p:nvSpPr>
         <p:spPr>
           <a:xfrm>
-            <a:off x="457200" y="1901952"/>
-            <a:ext cx="8229600" cy="475488"/>
+            <a:off x="365760" y="1719072"/>
+            <a:ext cx="8412480" cy="548640"/>
           </a:xfrm>
           <a:prstGeom prst="roundRect">
             <a:avLst>
-              <a:gd name="adj" fmla="val 19231"/>
+              <a:gd name="adj" fmla="val 16667"/>
             </a:avLst>
           </a:prstGeom>
           <a:solidFill>
-            <a:srgbClr val="E8F8EF"/>
+            <a:srgbClr val="FFFFFF"/>
           </a:solidFill>
           <a:ln/>
           <a:effectLst>
@@ -4531,7 +4421,7 @@
         </p:nvSpPr>
         <p:spPr>
           <a:xfrm>
-            <a:off x="640080" y="1956816"/>
+            <a:off x="594360" y="1810512"/>
             <a:ext cx="7863840" cy="365760"/>
           </a:xfrm>
           <a:prstGeom prst="rect">
@@ -4548,7 +4438,7 @@
               <a:buNone/>
             </a:pPr>
             <a:r>
-              <a:rPr lang="en-US" sz="1600" b="1" dirty="0">
+              <a:rPr lang="en-US" sz="1500" b="1" dirty="0">
                 <a:solidFill>
                   <a:srgbClr val="0E1C42"/>
                 </a:solidFill>
@@ -4556,7 +4446,7 @@
                 <a:ea typeface="Calibri" pitchFamily="34" charset="-122"/>
                 <a:cs typeface="Calibri" pitchFamily="34" charset="-120"/>
               </a:rPr>
-              <a:t>novels</a:t>
+              <a:t>novels  </a:t>
             </a:r>
             <a:pPr indent="0" marL="0">
               <a:buNone/>
@@ -4564,15 +4454,15 @@
             <a:r>
               <a:rPr lang="en-US" sz="1300" dirty="0">
                 <a:solidFill>
-                  <a:srgbClr val="64748B"/>
-                </a:solidFill>
-                <a:latin typeface="Calibri" pitchFamily="34" charset="0"/>
-                <a:ea typeface="Calibri" pitchFamily="34" charset="-122"/>
-                <a:cs typeface="Calibri" pitchFamily="34" charset="-120"/>
-              </a:rPr>
-              <a:t>  —  Common noun — lowercase.</a:t>
-            </a:r>
-            <a:endParaRPr lang="en-US" sz="1600" dirty="0"/>
+                  <a:srgbClr val="1E293B"/>
+                </a:solidFill>
+                <a:latin typeface="Calibri" pitchFamily="34" charset="0"/>
+                <a:ea typeface="Calibri" pitchFamily="34" charset="-122"/>
+                <a:cs typeface="Calibri" pitchFamily="34" charset="-120"/>
+              </a:rPr>
+              <a:t>Common noun — lowercase.</a:t>
+            </a:r>
+            <a:endParaRPr lang="en-US" sz="1500" dirty="0"/>
           </a:p>
         </p:txBody>
       </p:sp>
@@ -4584,16 +4474,16 @@
         </p:nvSpPr>
         <p:spPr>
           <a:xfrm>
-            <a:off x="457200" y="2432304"/>
-            <a:ext cx="8229600" cy="475488"/>
+            <a:off x="365760" y="2340864"/>
+            <a:ext cx="8412480" cy="548640"/>
           </a:xfrm>
           <a:prstGeom prst="roundRect">
             <a:avLst>
-              <a:gd name="adj" fmla="val 19231"/>
+              <a:gd name="adj" fmla="val 16667"/>
             </a:avLst>
           </a:prstGeom>
           <a:solidFill>
-            <a:srgbClr val="E8F8EF"/>
+            <a:srgbClr val="F8FAFC"/>
           </a:solidFill>
           <a:ln/>
           <a:effectLst>
@@ -4613,7 +4503,7 @@
         </p:nvSpPr>
         <p:spPr>
           <a:xfrm>
-            <a:off x="640080" y="2487168"/>
+            <a:off x="594360" y="2432304"/>
             <a:ext cx="7863840" cy="365760"/>
           </a:xfrm>
           <a:prstGeom prst="rect">
@@ -4630,7 +4520,7 @@
               <a:buNone/>
             </a:pPr>
             <a:r>
-              <a:rPr lang="en-US" sz="1600" b="1" dirty="0">
+              <a:rPr lang="en-US" sz="1500" b="1" dirty="0">
                 <a:solidFill>
                   <a:srgbClr val="0E1C42"/>
                 </a:solidFill>
@@ -4638,7 +4528,7 @@
                 <a:ea typeface="Calibri" pitchFamily="34" charset="-122"/>
                 <a:cs typeface="Calibri" pitchFamily="34" charset="-120"/>
               </a:rPr>
-              <a:t>—</a:t>
+              <a:t>—  </a:t>
             </a:r>
             <a:pPr indent="0" marL="0">
               <a:buNone/>
@@ -4646,15 +4536,15 @@
             <a:r>
               <a:rPr lang="en-US" sz="1300" dirty="0">
                 <a:solidFill>
-                  <a:srgbClr val="64748B"/>
-                </a:solidFill>
-                <a:latin typeface="Calibri" pitchFamily="34" charset="0"/>
-                <a:ea typeface="Calibri" pitchFamily="34" charset="-122"/>
-                <a:cs typeface="Calibri" pitchFamily="34" charset="-120"/>
-              </a:rPr>
-              <a:t>  —  Em dash — adds a strong contrast or explanation.</a:t>
-            </a:r>
-            <a:endParaRPr lang="en-US" sz="1600" dirty="0"/>
+                  <a:srgbClr val="1E293B"/>
+                </a:solidFill>
+                <a:latin typeface="Calibri" pitchFamily="34" charset="0"/>
+                <a:ea typeface="Calibri" pitchFamily="34" charset="-122"/>
+                <a:cs typeface="Calibri" pitchFamily="34" charset="-120"/>
+              </a:rPr>
+              <a:t>Em dash — adds a strong contrast or explanation.</a:t>
+            </a:r>
+            <a:endParaRPr lang="en-US" sz="1500" dirty="0"/>
           </a:p>
         </p:txBody>
       </p:sp>
@@ -4666,16 +4556,16 @@
         </p:nvSpPr>
         <p:spPr>
           <a:xfrm>
-            <a:off x="457200" y="2962656"/>
-            <a:ext cx="8229600" cy="475488"/>
+            <a:off x="365760" y="2962656"/>
+            <a:ext cx="8412480" cy="548640"/>
           </a:xfrm>
           <a:prstGeom prst="roundRect">
             <a:avLst>
-              <a:gd name="adj" fmla="val 19231"/>
+              <a:gd name="adj" fmla="val 16667"/>
             </a:avLst>
           </a:prstGeom>
           <a:solidFill>
-            <a:srgbClr val="E8F8EF"/>
+            <a:srgbClr val="FFFFFF"/>
           </a:solidFill>
           <a:ln/>
           <a:effectLst>
@@ -4695,7 +4585,7 @@
         </p:nvSpPr>
         <p:spPr>
           <a:xfrm>
-            <a:off x="640080" y="3017520"/>
+            <a:off x="594360" y="3054096"/>
             <a:ext cx="7863840" cy="365760"/>
           </a:xfrm>
           <a:prstGeom prst="rect">
@@ -4712,7 +4602,7 @@
               <a:buNone/>
             </a:pPr>
             <a:r>
-              <a:rPr lang="en-US" sz="1600" b="1" dirty="0">
+              <a:rPr lang="en-US" sz="1500" b="1" dirty="0">
                 <a:solidFill>
                   <a:srgbClr val="0E1C42"/>
                 </a:solidFill>
@@ -4720,7 +4610,7 @@
                 <a:ea typeface="Calibri" pitchFamily="34" charset="-122"/>
                 <a:cs typeface="Calibri" pitchFamily="34" charset="-120"/>
               </a:rPr>
-              <a:t>chosen, tested, and built</a:t>
+              <a:t>chosen, tested, and built  </a:t>
             </a:r>
             <a:pPr indent="0" marL="0">
               <a:buNone/>
@@ -4728,97 +4618,15 @@
             <a:r>
               <a:rPr lang="en-US" sz="1300" dirty="0">
                 <a:solidFill>
-                  <a:srgbClr val="64748B"/>
-                </a:solidFill>
-                <a:latin typeface="Calibri" pitchFamily="34" charset="0"/>
-                <a:ea typeface="Calibri" pitchFamily="34" charset="-122"/>
-                <a:cs typeface="Calibri" pitchFamily="34" charset="-120"/>
-              </a:rPr>
-              <a:t>  —  Parallel verbs in a series — commas separate them.</a:t>
-            </a:r>
-            <a:endParaRPr lang="en-US" sz="1600" dirty="0"/>
-          </a:p>
-        </p:txBody>
-      </p:sp>
-      <p:sp>
-        <p:nvSpPr>
-          <p:cNvPr id="13" name="Shape 11"/>
-          <p:cNvSpPr/>
-          <p:nvPr/>
-        </p:nvSpPr>
-        <p:spPr>
-          <a:xfrm>
-            <a:off x="457200" y="3493008"/>
-            <a:ext cx="8229600" cy="475488"/>
-          </a:xfrm>
-          <a:prstGeom prst="roundRect">
-            <a:avLst>
-              <a:gd name="adj" fmla="val 19231"/>
-            </a:avLst>
-          </a:prstGeom>
-          <a:solidFill>
-            <a:srgbClr val="E8F8EF"/>
-          </a:solidFill>
-          <a:ln/>
-          <a:effectLst>
-            <a:outerShdw sx="100000" sy="100000" kx="0" ky="0" algn="bl" rotWithShape="0" blurRad="101600" dist="38100" dir="2700000">
-              <a:srgbClr val="000000">
-                <a:alpha val="12000"/>
-              </a:srgbClr>
-            </a:outerShdw>
-          </a:effectLst>
-        </p:spPr>
-      </p:sp>
-      <p:sp>
-        <p:nvSpPr>
-          <p:cNvPr id="14" name="Text 12"/>
-          <p:cNvSpPr/>
-          <p:nvPr/>
-        </p:nvSpPr>
-        <p:spPr>
-          <a:xfrm>
-            <a:off x="640080" y="3547872"/>
-            <a:ext cx="7863840" cy="365760"/>
-          </a:xfrm>
-          <a:prstGeom prst="rect">
-            <a:avLst/>
-          </a:prstGeom>
-          <a:noFill/>
-          <a:ln/>
-        </p:spPr>
-        <p:txBody>
-          <a:bodyPr wrap="square" lIns="0" tIns="0" rIns="0" bIns="0" rtlCol="0" anchor="ctr"/>
-          <a:lstStyle/>
-          <a:p>
-            <a:pPr indent="0" marL="0">
-              <a:buNone/>
-            </a:pPr>
-            <a:r>
-              <a:rPr lang="en-US" sz="1600" b="1" dirty="0">
-                <a:solidFill>
-                  <a:srgbClr val="0E1C42"/>
-                </a:solidFill>
-                <a:latin typeface="Calibri" pitchFamily="34" charset="0"/>
-                <a:ea typeface="Calibri" pitchFamily="34" charset="-122"/>
-                <a:cs typeface="Calibri" pitchFamily="34" charset="-120"/>
-              </a:rPr>
-              <a:t>time.</a:t>
-            </a:r>
-            <a:pPr indent="0" marL="0">
-              <a:buNone/>
-            </a:pPr>
-            <a:r>
-              <a:rPr lang="en-US" sz="1300" dirty="0">
-                <a:solidFill>
-                  <a:srgbClr val="64748B"/>
-                </a:solidFill>
-                <a:latin typeface="Calibri" pitchFamily="34" charset="0"/>
-                <a:ea typeface="Calibri" pitchFamily="34" charset="-122"/>
-                <a:cs typeface="Calibri" pitchFamily="34" charset="-120"/>
-              </a:rPr>
-              <a:t>  —  Period — ends the sentence.</a:t>
-            </a:r>
-            <a:endParaRPr lang="en-US" sz="1600" dirty="0"/>
+                  <a:srgbClr val="1E293B"/>
+                </a:solidFill>
+                <a:latin typeface="Calibri" pitchFamily="34" charset="0"/>
+                <a:ea typeface="Calibri" pitchFamily="34" charset="-122"/>
+                <a:cs typeface="Calibri" pitchFamily="34" charset="-120"/>
+              </a:rPr>
+              <a:t>Parallel verbs in a series — commas separate them.</a:t>
+            </a:r>
+            <a:endParaRPr lang="en-US" sz="1500" dirty="0"/>
           </a:p>
         </p:txBody>
       </p:sp>
@@ -4836,7 +4644,7 @@
     <p:bg>
       <p:bgPr>
         <a:solidFill>
-          <a:srgbClr val="E5F7FC"/>
+          <a:srgbClr val="F8FAFC"/>
         </a:solidFill>
       </p:bgPr>
     </p:bg>
@@ -4856,14 +4664,34 @@
       </p:grpSpPr>
       <p:sp>
         <p:nvSpPr>
-          <p:cNvPr id="2" name="Text 0"/>
-          <p:cNvSpPr/>
-          <p:nvPr/>
-        </p:nvSpPr>
-        <p:spPr>
-          <a:xfrm>
-            <a:off x="365760" y="164592"/>
-            <a:ext cx="5943600" cy="566928"/>
+          <p:cNvPr id="2" name="Shape 0"/>
+          <p:cNvSpPr/>
+          <p:nvPr/>
+        </p:nvSpPr>
+        <p:spPr>
+          <a:xfrm>
+            <a:off x="0" y="0"/>
+            <a:ext cx="9144000" cy="566928"/>
+          </a:xfrm>
+          <a:prstGeom prst="rect">
+            <a:avLst/>
+          </a:prstGeom>
+          <a:solidFill>
+            <a:srgbClr val="55C8E8"/>
+          </a:solidFill>
+          <a:ln/>
+        </p:spPr>
+      </p:sp>
+      <p:sp>
+        <p:nvSpPr>
+          <p:cNvPr id="3" name="Text 1"/>
+          <p:cNvSpPr/>
+          <p:nvPr/>
+        </p:nvSpPr>
+        <p:spPr>
+          <a:xfrm>
+            <a:off x="365760" y="54864"/>
+            <a:ext cx="8412480" cy="457200"/>
           </a:xfrm>
           <a:prstGeom prst="rect">
             <a:avLst/>
@@ -4875,130 +4703,85 @@
           <a:bodyPr wrap="square" lIns="0" tIns="0" rIns="0" bIns="0" rtlCol="0" anchor="ctr"/>
           <a:lstStyle/>
           <a:p>
-            <a:pPr algn="l" indent="0" marL="0">
-              <a:buNone/>
-            </a:pPr>
-            <a:r>
-              <a:rPr lang="en-US" sz="2800" b="1" dirty="0">
-                <a:solidFill>
-                  <a:srgbClr val="0E1C42"/>
-                </a:solidFill>
-                <a:latin typeface="Calibri" pitchFamily="34" charset="0"/>
-                <a:ea typeface="Calibri" pitchFamily="34" charset="-122"/>
-                <a:cs typeface="Calibri" pitchFamily="34" charset="-120"/>
-              </a:rPr>
-              <a:t>🔧 Fix-It Sentence — Now You Try</a:t>
-            </a:r>
-            <a:endParaRPr lang="en-US" sz="2800" dirty="0"/>
-          </a:p>
-        </p:txBody>
-      </p:sp>
-      <p:sp>
-        <p:nvSpPr>
-          <p:cNvPr id="3" name="Shape 1"/>
+            <a:pPr indent="0" marL="0">
+              <a:buNone/>
+            </a:pPr>
+            <a:r>
+              <a:rPr lang="en-US" sz="2200" b="1" dirty="0">
+                <a:solidFill>
+                  <a:srgbClr val="FFFFFF"/>
+                </a:solidFill>
+                <a:latin typeface="Calibri" pitchFamily="34" charset="0"/>
+                <a:ea typeface="Calibri" pitchFamily="34" charset="-122"/>
+                <a:cs typeface="Calibri" pitchFamily="34" charset="-120"/>
+              </a:rPr>
+              <a:t>✏️  Daily Oral Language</a:t>
+            </a:r>
+            <a:endParaRPr lang="en-US" sz="2200" dirty="0"/>
+          </a:p>
+        </p:txBody>
+      </p:sp>
+      <p:sp>
+        <p:nvSpPr>
+          <p:cNvPr id="4" name="Text 2"/>
           <p:cNvSpPr/>
           <p:nvPr/>
         </p:nvSpPr>
         <p:spPr>
           <a:xfrm>
             <a:off x="365760" y="749808"/>
-            <a:ext cx="8412480" cy="0"/>
-          </a:xfrm>
-          <a:prstGeom prst="line">
-            <a:avLst/>
-          </a:prstGeom>
-          <a:noFill/>
+            <a:ext cx="8229600" cy="237744"/>
+          </a:xfrm>
+          <a:prstGeom prst="rect">
+            <a:avLst/>
+          </a:prstGeom>
+          <a:noFill/>
+          <a:ln/>
+        </p:spPr>
+        <p:txBody>
+          <a:bodyPr wrap="square" lIns="0" tIns="0" rIns="0" bIns="0" rtlCol="0" anchor="ctr"/>
+          <a:lstStyle/>
+          <a:p>
+            <a:pPr indent="0" marL="0">
+              <a:buNone/>
+            </a:pPr>
+            <a:r>
+              <a:rPr lang="en-US" sz="1100" b="1" spc="100" kern="0" dirty="0">
+                <a:solidFill>
+                  <a:srgbClr val="55C8E8"/>
+                </a:solidFill>
+                <a:latin typeface="Calibri" pitchFamily="34" charset="0"/>
+                <a:ea typeface="Calibri" pitchFamily="34" charset="-122"/>
+                <a:cs typeface="Calibri" pitchFamily="34" charset="-120"/>
+              </a:rPr>
+              <a:t>NOW FIX THIS ONE</a:t>
+            </a:r>
+            <a:endParaRPr lang="en-US" sz="1100" dirty="0"/>
+          </a:p>
+        </p:txBody>
+      </p:sp>
+      <p:sp>
+        <p:nvSpPr>
+          <p:cNvPr id="5" name="Shape 3"/>
+          <p:cNvSpPr/>
+          <p:nvPr/>
+        </p:nvSpPr>
+        <p:spPr>
+          <a:xfrm>
+            <a:off x="365760" y="1024128"/>
+            <a:ext cx="8412480" cy="777240"/>
+          </a:xfrm>
+          <a:prstGeom prst="roundRect">
+            <a:avLst>
+              <a:gd name="adj" fmla="val 11765"/>
+            </a:avLst>
+          </a:prstGeom>
+          <a:solidFill>
+            <a:srgbClr val="FFFFFF"/>
+          </a:solidFill>
           <a:ln w="19050">
             <a:solidFill>
-              <a:srgbClr val="E67E22"/>
-            </a:solidFill>
-            <a:prstDash val="solid"/>
-          </a:ln>
-        </p:spPr>
-      </p:sp>
-      <p:sp>
-        <p:nvSpPr>
-          <p:cNvPr id="4" name="Shape 2"/>
-          <p:cNvSpPr/>
-          <p:nvPr/>
-        </p:nvSpPr>
-        <p:spPr>
-          <a:xfrm>
-            <a:off x="6492240" y="173736"/>
-            <a:ext cx="2286000" cy="502920"/>
-          </a:xfrm>
-          <a:prstGeom prst="roundRect">
-            <a:avLst>
-              <a:gd name="adj" fmla="val 21818"/>
-            </a:avLst>
-          </a:prstGeom>
-          <a:solidFill>
-            <a:srgbClr val="E67E22"/>
-          </a:solidFill>
-          <a:ln/>
-        </p:spPr>
-      </p:sp>
-      <p:sp>
-        <p:nvSpPr>
-          <p:cNvPr id="5" name="Text 3"/>
-          <p:cNvSpPr/>
-          <p:nvPr/>
-        </p:nvSpPr>
-        <p:spPr>
-          <a:xfrm>
-            <a:off x="6492240" y="173736"/>
-            <a:ext cx="2286000" cy="502920"/>
-          </a:xfrm>
-          <a:prstGeom prst="rect">
-            <a:avLst/>
-          </a:prstGeom>
-          <a:noFill/>
-          <a:ln/>
-        </p:spPr>
-        <p:txBody>
-          <a:bodyPr wrap="square" lIns="0" tIns="0" rIns="0" bIns="0" rtlCol="0" anchor="ctr"/>
-          <a:lstStyle/>
-          <a:p>
-            <a:pPr algn="ctr" indent="0" marL="0">
-              <a:buNone/>
-            </a:pPr>
-            <a:r>
-              <a:rPr lang="en-US" sz="1100" b="1" dirty="0">
-                <a:solidFill>
-                  <a:srgbClr val="0E1C42"/>
-                </a:solidFill>
-                <a:latin typeface="Calibri" pitchFamily="34" charset="0"/>
-                <a:ea typeface="Calibri" pitchFamily="34" charset="-122"/>
-                <a:cs typeface="Calibri" pitchFamily="34" charset="-120"/>
-              </a:rPr>
-              <a:t>CHAT PROMPT</a:t>
-            </a:r>
-            <a:endParaRPr lang="en-US" sz="1100" dirty="0"/>
-          </a:p>
-        </p:txBody>
-      </p:sp>
-      <p:sp>
-        <p:nvSpPr>
-          <p:cNvPr id="6" name="Shape 4"/>
-          <p:cNvSpPr/>
-          <p:nvPr/>
-        </p:nvSpPr>
-        <p:spPr>
-          <a:xfrm>
-            <a:off x="457200" y="1005840"/>
-            <a:ext cx="8229600" cy="640080"/>
-          </a:xfrm>
-          <a:prstGeom prst="roundRect">
-            <a:avLst>
-              <a:gd name="adj" fmla="val 14286"/>
-            </a:avLst>
-          </a:prstGeom>
-          <a:solidFill>
-            <a:srgbClr val="F8FAFC"/>
-          </a:solidFill>
-          <a:ln w="12700">
-            <a:solidFill>
-              <a:srgbClr val="C7922C"/>
+              <a:srgbClr val="55C8E8"/>
             </a:solidFill>
             <a:prstDash val="solid"/>
           </a:ln>
@@ -5013,14 +4796,53 @@
       </p:sp>
       <p:sp>
         <p:nvSpPr>
+          <p:cNvPr id="6" name="Text 4"/>
+          <p:cNvSpPr/>
+          <p:nvPr/>
+        </p:nvSpPr>
+        <p:spPr>
+          <a:xfrm>
+            <a:off x="594360" y="1152144"/>
+            <a:ext cx="7955280" cy="521208"/>
+          </a:xfrm>
+          <a:prstGeom prst="rect">
+            <a:avLst/>
+          </a:prstGeom>
+          <a:noFill/>
+          <a:ln/>
+        </p:spPr>
+        <p:txBody>
+          <a:bodyPr wrap="square" lIns="0" tIns="0" rIns="0" bIns="0" rtlCol="0" anchor="ctr"/>
+          <a:lstStyle/>
+          <a:p>
+            <a:pPr indent="0" marL="0">
+              <a:buNone/>
+            </a:pPr>
+            <a:r>
+              <a:rPr lang="en-US" sz="1700" dirty="0">
+                <a:solidFill>
+                  <a:srgbClr val="1E293B"/>
+                </a:solidFill>
+                <a:latin typeface="Calibri" pitchFamily="34" charset="0"/>
+                <a:ea typeface="Calibri" pitchFamily="34" charset="-122"/>
+                <a:cs typeface="Calibri" pitchFamily="34" charset="-120"/>
+              </a:rPr>
+              <a:t>by the end of their stories each character we read about had grown in ways that surprised even themselves</a:t>
+            </a:r>
+            <a:endParaRPr lang="en-US" sz="1700" dirty="0"/>
+          </a:p>
+        </p:txBody>
+      </p:sp>
+      <p:sp>
+        <p:nvSpPr>
           <p:cNvPr id="7" name="Text 5"/>
           <p:cNvSpPr/>
           <p:nvPr/>
         </p:nvSpPr>
         <p:spPr>
           <a:xfrm>
-            <a:off x="640080" y="1115568"/>
-            <a:ext cx="7863840" cy="411480"/>
+            <a:off x="365760" y="2788920"/>
+            <a:ext cx="8412480" cy="365760"/>
           </a:xfrm>
           <a:prstGeom prst="rect">
             <a:avLst/>
@@ -5036,17 +4858,17 @@
               <a:buNone/>
             </a:pPr>
             <a:r>
-              <a:rPr lang="en-US" sz="1800" i="1" dirty="0">
-                <a:solidFill>
-                  <a:srgbClr val="1E293B"/>
-                </a:solidFill>
-                <a:latin typeface="Calibri" pitchFamily="34" charset="0"/>
-                <a:ea typeface="Calibri" pitchFamily="34" charset="-122"/>
-                <a:cs typeface="Calibri" pitchFamily="34" charset="-120"/>
-              </a:rPr>
-              <a:t>by the end of their stories each character we read about had grown in ways that surprised even themselves</a:t>
-            </a:r>
-            <a:endParaRPr lang="en-US" sz="1800" dirty="0"/>
+              <a:rPr lang="en-US" sz="1600" b="1" dirty="0">
+                <a:solidFill>
+                  <a:srgbClr val="0E1C42"/>
+                </a:solidFill>
+                <a:latin typeface="Calibri" pitchFamily="34" charset="0"/>
+                <a:ea typeface="Calibri" pitchFamily="34" charset="-122"/>
+                <a:cs typeface="Calibri" pitchFamily="34" charset="-120"/>
+              </a:rPr>
+              <a:t>Rewrite the sentence correctly in your notebook.</a:t>
+            </a:r>
+            <a:endParaRPr lang="en-US" sz="1600" dirty="0"/>
           </a:p>
         </p:txBody>
       </p:sp>
@@ -5064,7 +4886,7 @@
     <p:bg>
       <p:bgPr>
         <a:solidFill>
-          <a:srgbClr val="E5F7FC"/>
+          <a:srgbClr val="F8FAFC"/>
         </a:solidFill>
       </p:bgPr>
     </p:bg>
@@ -5084,14 +4906,34 @@
       </p:grpSpPr>
       <p:sp>
         <p:nvSpPr>
-          <p:cNvPr id="2" name="Text 0"/>
-          <p:cNvSpPr/>
-          <p:nvPr/>
-        </p:nvSpPr>
-        <p:spPr>
-          <a:xfrm>
-            <a:off x="365760" y="164592"/>
-            <a:ext cx="5943600" cy="566928"/>
+          <p:cNvPr id="2" name="Shape 0"/>
+          <p:cNvSpPr/>
+          <p:nvPr/>
+        </p:nvSpPr>
+        <p:spPr>
+          <a:xfrm>
+            <a:off x="0" y="0"/>
+            <a:ext cx="9144000" cy="566928"/>
+          </a:xfrm>
+          <a:prstGeom prst="rect">
+            <a:avLst/>
+          </a:prstGeom>
+          <a:solidFill>
+            <a:srgbClr val="55C8E8"/>
+          </a:solidFill>
+          <a:ln/>
+        </p:spPr>
+      </p:sp>
+      <p:sp>
+        <p:nvSpPr>
+          <p:cNvPr id="3" name="Text 1"/>
+          <p:cNvSpPr/>
+          <p:nvPr/>
+        </p:nvSpPr>
+        <p:spPr>
+          <a:xfrm>
+            <a:off x="365760" y="54864"/>
+            <a:ext cx="8412480" cy="457200"/>
           </a:xfrm>
           <a:prstGeom prst="rect">
             <a:avLst/>
@@ -5103,130 +4945,85 @@
           <a:bodyPr wrap="square" lIns="0" tIns="0" rIns="0" bIns="0" rtlCol="0" anchor="ctr"/>
           <a:lstStyle/>
           <a:p>
-            <a:pPr algn="l" indent="0" marL="0">
-              <a:buNone/>
-            </a:pPr>
-            <a:r>
-              <a:rPr lang="en-US" sz="2800" b="1" dirty="0">
-                <a:solidFill>
-                  <a:srgbClr val="0E1C42"/>
-                </a:solidFill>
-                <a:latin typeface="Calibri" pitchFamily="34" charset="0"/>
-                <a:ea typeface="Calibri" pitchFamily="34" charset="-122"/>
-                <a:cs typeface="Calibri" pitchFamily="34" charset="-120"/>
-              </a:rPr>
-              <a:t>🔧 Fix-It Sentence — Answer Revealed</a:t>
-            </a:r>
-            <a:endParaRPr lang="en-US" sz="2800" dirty="0"/>
-          </a:p>
-        </p:txBody>
-      </p:sp>
-      <p:sp>
-        <p:nvSpPr>
-          <p:cNvPr id="3" name="Shape 1"/>
+            <a:pPr indent="0" marL="0">
+              <a:buNone/>
+            </a:pPr>
+            <a:r>
+              <a:rPr lang="en-US" sz="2200" b="1" dirty="0">
+                <a:solidFill>
+                  <a:srgbClr val="FFFFFF"/>
+                </a:solidFill>
+                <a:latin typeface="Calibri" pitchFamily="34" charset="0"/>
+                <a:ea typeface="Calibri" pitchFamily="34" charset="-122"/>
+                <a:cs typeface="Calibri" pitchFamily="34" charset="-120"/>
+              </a:rPr>
+              <a:t>✏️  Daily Oral Language</a:t>
+            </a:r>
+            <a:endParaRPr lang="en-US" sz="2200" dirty="0"/>
+          </a:p>
+        </p:txBody>
+      </p:sp>
+      <p:sp>
+        <p:nvSpPr>
+          <p:cNvPr id="4" name="Text 2"/>
           <p:cNvSpPr/>
           <p:nvPr/>
         </p:nvSpPr>
         <p:spPr>
           <a:xfrm>
             <a:off x="365760" y="749808"/>
-            <a:ext cx="8412480" cy="0"/>
-          </a:xfrm>
-          <a:prstGeom prst="line">
-            <a:avLst/>
-          </a:prstGeom>
-          <a:noFill/>
+            <a:ext cx="8229600" cy="237744"/>
+          </a:xfrm>
+          <a:prstGeom prst="rect">
+            <a:avLst/>
+          </a:prstGeom>
+          <a:noFill/>
+          <a:ln/>
+        </p:spPr>
+        <p:txBody>
+          <a:bodyPr wrap="square" lIns="0" tIns="0" rIns="0" bIns="0" rtlCol="0" anchor="ctr"/>
+          <a:lstStyle/>
+          <a:p>
+            <a:pPr indent="0" marL="0">
+              <a:buNone/>
+            </a:pPr>
+            <a:r>
+              <a:rPr lang="en-US" sz="1100" b="1" spc="100" kern="0" dirty="0">
+                <a:solidFill>
+                  <a:srgbClr val="55C8E8"/>
+                </a:solidFill>
+                <a:latin typeface="Calibri" pitchFamily="34" charset="0"/>
+                <a:ea typeface="Calibri" pitchFamily="34" charset="-122"/>
+                <a:cs typeface="Calibri" pitchFamily="34" charset="-120"/>
+              </a:rPr>
+              <a:t>NOW FIX THIS ONE</a:t>
+            </a:r>
+            <a:endParaRPr lang="en-US" sz="1100" dirty="0"/>
+          </a:p>
+        </p:txBody>
+      </p:sp>
+      <p:sp>
+        <p:nvSpPr>
+          <p:cNvPr id="5" name="Shape 3"/>
+          <p:cNvSpPr/>
+          <p:nvPr/>
+        </p:nvSpPr>
+        <p:spPr>
+          <a:xfrm>
+            <a:off x="365760" y="1024128"/>
+            <a:ext cx="8412480" cy="777240"/>
+          </a:xfrm>
+          <a:prstGeom prst="roundRect">
+            <a:avLst>
+              <a:gd name="adj" fmla="val 11765"/>
+            </a:avLst>
+          </a:prstGeom>
+          <a:solidFill>
+            <a:srgbClr val="FFFFFF"/>
+          </a:solidFill>
           <a:ln w="19050">
             <a:solidFill>
-              <a:srgbClr val="E67E22"/>
-            </a:solidFill>
-            <a:prstDash val="solid"/>
-          </a:ln>
-        </p:spPr>
-      </p:sp>
-      <p:sp>
-        <p:nvSpPr>
-          <p:cNvPr id="4" name="Shape 2"/>
-          <p:cNvSpPr/>
-          <p:nvPr/>
-        </p:nvSpPr>
-        <p:spPr>
-          <a:xfrm>
-            <a:off x="6492240" y="173736"/>
-            <a:ext cx="2286000" cy="502920"/>
-          </a:xfrm>
-          <a:prstGeom prst="roundRect">
-            <a:avLst>
-              <a:gd name="adj" fmla="val 21818"/>
-            </a:avLst>
-          </a:prstGeom>
-          <a:solidFill>
-            <a:srgbClr val="E67E22"/>
-          </a:solidFill>
-          <a:ln/>
-        </p:spPr>
-      </p:sp>
-      <p:sp>
-        <p:nvSpPr>
-          <p:cNvPr id="5" name="Text 3"/>
-          <p:cNvSpPr/>
-          <p:nvPr/>
-        </p:nvSpPr>
-        <p:spPr>
-          <a:xfrm>
-            <a:off x="6492240" y="173736"/>
-            <a:ext cx="2286000" cy="502920"/>
-          </a:xfrm>
-          <a:prstGeom prst="rect">
-            <a:avLst/>
-          </a:prstGeom>
-          <a:noFill/>
-          <a:ln/>
-        </p:spPr>
-        <p:txBody>
-          <a:bodyPr wrap="square" lIns="0" tIns="0" rIns="0" bIns="0" rtlCol="0" anchor="ctr"/>
-          <a:lstStyle/>
-          <a:p>
-            <a:pPr algn="ctr" indent="0" marL="0">
-              <a:buNone/>
-            </a:pPr>
-            <a:r>
-              <a:rPr lang="en-US" sz="1100" b="1" dirty="0">
-                <a:solidFill>
-                  <a:srgbClr val="0E1C42"/>
-                </a:solidFill>
-                <a:latin typeface="Calibri" pitchFamily="34" charset="0"/>
-                <a:ea typeface="Calibri" pitchFamily="34" charset="-122"/>
-                <a:cs typeface="Calibri" pitchFamily="34" charset="-120"/>
-              </a:rPr>
-              <a:t>CHAT PROMPT</a:t>
-            </a:r>
-            <a:endParaRPr lang="en-US" sz="1100" dirty="0"/>
-          </a:p>
-        </p:txBody>
-      </p:sp>
-      <p:sp>
-        <p:nvSpPr>
-          <p:cNvPr id="6" name="Shape 4"/>
-          <p:cNvSpPr/>
-          <p:nvPr/>
-        </p:nvSpPr>
-        <p:spPr>
-          <a:xfrm>
-            <a:off x="457200" y="1005840"/>
-            <a:ext cx="8229600" cy="640080"/>
-          </a:xfrm>
-          <a:prstGeom prst="roundRect">
-            <a:avLst>
-              <a:gd name="adj" fmla="val 14286"/>
-            </a:avLst>
-          </a:prstGeom>
-          <a:solidFill>
-            <a:srgbClr val="F8FAFC"/>
-          </a:solidFill>
-          <a:ln w="12700">
-            <a:solidFill>
-              <a:srgbClr val="C7922C"/>
+              <a:srgbClr val="55C8E8"/>
             </a:solidFill>
             <a:prstDash val="solid"/>
           </a:ln>
@@ -5241,14 +5038,14 @@
       </p:sp>
       <p:sp>
         <p:nvSpPr>
-          <p:cNvPr id="7" name="Text 5"/>
-          <p:cNvSpPr/>
-          <p:nvPr/>
-        </p:nvSpPr>
-        <p:spPr>
-          <a:xfrm>
-            <a:off x="640080" y="1115568"/>
-            <a:ext cx="7863840" cy="411480"/>
+          <p:cNvPr id="6" name="Text 4"/>
+          <p:cNvSpPr/>
+          <p:nvPr/>
+        </p:nvSpPr>
+        <p:spPr>
+          <a:xfrm>
+            <a:off x="594360" y="1152144"/>
+            <a:ext cx="7955280" cy="521208"/>
           </a:xfrm>
           <a:prstGeom prst="rect">
             <a:avLst/>
@@ -5264,7 +5061,7 @@
               <a:buNone/>
             </a:pPr>
             <a:r>
-              <a:rPr lang="en-US" sz="1800" i="1" dirty="0">
+              <a:rPr lang="en-US" sz="1700" dirty="0">
                 <a:solidFill>
                   <a:srgbClr val="1E293B"/>
                 </a:solidFill>
@@ -5274,74 +5071,30 @@
               </a:rPr>
               <a:t>by the end of their stories each character we read about had grown in ways that surprised even themselves</a:t>
             </a:r>
-            <a:endParaRPr lang="en-US" sz="1800" dirty="0"/>
-          </a:p>
-        </p:txBody>
-      </p:sp>
-      <p:sp>
-        <p:nvSpPr>
-          <p:cNvPr id="8" name="Text 6"/>
-          <p:cNvSpPr/>
-          <p:nvPr/>
-        </p:nvSpPr>
-        <p:spPr>
-          <a:xfrm>
-            <a:off x="457200" y="1737360"/>
-            <a:ext cx="8046720" cy="292608"/>
-          </a:xfrm>
-          <a:prstGeom prst="rect">
-            <a:avLst/>
-          </a:prstGeom>
-          <a:noFill/>
-          <a:ln/>
-        </p:spPr>
-        <p:txBody>
-          <a:bodyPr wrap="square" lIns="0" tIns="0" rIns="0" bIns="0" rtlCol="0" anchor="ctr"/>
-          <a:lstStyle/>
-          <a:p>
-            <a:pPr indent="0" marL="0">
-              <a:buNone/>
-            </a:pPr>
-            <a:r>
-              <a:rPr lang="en-US" sz="1100" b="1" spc="200" kern="0" dirty="0">
-                <a:solidFill>
-                  <a:srgbClr val="34B76F"/>
-                </a:solidFill>
-                <a:latin typeface="Calibri" pitchFamily="34" charset="0"/>
-                <a:ea typeface="Calibri" pitchFamily="34" charset="-122"/>
-                <a:cs typeface="Calibri" pitchFamily="34" charset="-120"/>
-              </a:rPr>
-              <a:t>CORRECTED</a:t>
-            </a:r>
-            <a:endParaRPr lang="en-US" sz="1100" dirty="0"/>
-          </a:p>
-        </p:txBody>
-      </p:sp>
-      <p:sp>
-        <p:nvSpPr>
-          <p:cNvPr id="9" name="Shape 7"/>
-          <p:cNvSpPr/>
-          <p:nvPr/>
-        </p:nvSpPr>
-        <p:spPr>
-          <a:xfrm>
-            <a:off x="457200" y="2057400"/>
-            <a:ext cx="8229600" cy="640080"/>
+            <a:endParaRPr lang="en-US" sz="1700" dirty="0"/>
+          </a:p>
+        </p:txBody>
+      </p:sp>
+      <p:sp>
+        <p:nvSpPr>
+          <p:cNvPr id="7" name="Shape 5"/>
+          <p:cNvSpPr/>
+          <p:nvPr/>
+        </p:nvSpPr>
+        <p:spPr>
+          <a:xfrm>
+            <a:off x="365760" y="2743200"/>
+            <a:ext cx="8412480" cy="1417320"/>
           </a:xfrm>
           <a:prstGeom prst="roundRect">
             <a:avLst>
-              <a:gd name="adj" fmla="val 14286"/>
+              <a:gd name="adj" fmla="val 6452"/>
             </a:avLst>
           </a:prstGeom>
           <a:solidFill>
             <a:srgbClr val="E8F8EF"/>
           </a:solidFill>
-          <a:ln w="12700">
-            <a:solidFill>
-              <a:srgbClr val="34B76F"/>
-            </a:solidFill>
-            <a:prstDash val="solid"/>
-          </a:ln>
+          <a:ln/>
           <a:effectLst>
             <a:outerShdw sx="100000" sy="100000" kx="0" ky="0" algn="bl" rotWithShape="0" blurRad="101600" dist="38100" dir="2700000">
               <a:srgbClr val="000000">
@@ -5353,14 +5106,98 @@
       </p:sp>
       <p:sp>
         <p:nvSpPr>
+          <p:cNvPr id="8" name="Text 6"/>
+          <p:cNvSpPr/>
+          <p:nvPr/>
+        </p:nvSpPr>
+        <p:spPr>
+          <a:xfrm>
+            <a:off x="566928" y="2816352"/>
+            <a:ext cx="8229600" cy="237744"/>
+          </a:xfrm>
+          <a:prstGeom prst="rect">
+            <a:avLst/>
+          </a:prstGeom>
+          <a:noFill/>
+          <a:ln/>
+        </p:spPr>
+        <p:txBody>
+          <a:bodyPr wrap="square" lIns="0" tIns="0" rIns="0" bIns="0" rtlCol="0" anchor="ctr"/>
+          <a:lstStyle/>
+          <a:p>
+            <a:pPr indent="0" marL="0">
+              <a:buNone/>
+            </a:pPr>
+            <a:r>
+              <a:rPr lang="en-US" sz="1100" b="1" spc="100" kern="0" dirty="0">
+                <a:solidFill>
+                  <a:srgbClr val="34B76F"/>
+                </a:solidFill>
+                <a:latin typeface="Calibri" pitchFamily="34" charset="0"/>
+                <a:ea typeface="Calibri" pitchFamily="34" charset="-122"/>
+                <a:cs typeface="Calibri" pitchFamily="34" charset="-120"/>
+              </a:rPr>
+              <a:t>✅  CORRECTED</a:t>
+            </a:r>
+            <a:endParaRPr lang="en-US" sz="1100" dirty="0"/>
+          </a:p>
+        </p:txBody>
+      </p:sp>
+      <p:sp>
+        <p:nvSpPr>
+          <p:cNvPr id="9" name="Text 7"/>
+          <p:cNvSpPr/>
+          <p:nvPr/>
+        </p:nvSpPr>
+        <p:spPr>
+          <a:xfrm>
+            <a:off x="566928" y="3072384"/>
+            <a:ext cx="8010144" cy="685800"/>
+          </a:xfrm>
+          <a:prstGeom prst="rect">
+            <a:avLst/>
+          </a:prstGeom>
+          <a:noFill/>
+          <a:ln/>
+        </p:spPr>
+        <p:txBody>
+          <a:bodyPr wrap="square" lIns="0" tIns="0" rIns="0" bIns="0" rtlCol="0" anchor="ctr"/>
+          <a:lstStyle/>
+          <a:p>
+            <a:pPr indent="0" marL="0">
+              <a:buNone/>
+            </a:pPr>
+            <a:r>
+              <a:rPr lang="en-US" sz="1400" i="1" dirty="0">
+                <a:solidFill>
+                  <a:srgbClr val="1E293B"/>
+                </a:solidFill>
+                <a:latin typeface="Calibri" pitchFamily="34" charset="0"/>
+                <a:ea typeface="Calibri" pitchFamily="34" charset="-122"/>
+                <a:cs typeface="Calibri" pitchFamily="34" charset="-120"/>
+              </a:rPr>
+              <a:t>Corrected: By the end of their stories, each character we read about had grown in ways that surprised even themselves.</a:t>
+            </a:r>
+            <a:endParaRPr lang="en-US" sz="1400" dirty="0"/>
+          </a:p>
+          <a:p>
+            <a:pPr indent="0" marL="0">
+              <a:buNone/>
+            </a:pPr>
+            <a:endParaRPr lang="en-US" sz="1400" dirty="0"/>
+          </a:p>
+        </p:txBody>
+      </p:sp>
+      <p:sp>
+        <p:nvSpPr>
           <p:cNvPr id="10" name="Text 8"/>
           <p:cNvSpPr/>
           <p:nvPr/>
         </p:nvSpPr>
         <p:spPr>
           <a:xfrm>
-            <a:off x="640080" y="2167128"/>
-            <a:ext cx="7863840" cy="411480"/>
+            <a:off x="566928" y="3767328"/>
+            <a:ext cx="8010144" cy="320040"/>
           </a:xfrm>
           <a:prstGeom prst="rect">
             <a:avLst/>
@@ -5376,46 +5213,7 @@
               <a:buNone/>
             </a:pPr>
             <a:r>
-              <a:rPr lang="en-US" sz="1800" i="1" dirty="0">
-                <a:solidFill>
-                  <a:srgbClr val="34B76F"/>
-                </a:solidFill>
-                <a:latin typeface="Calibri" pitchFamily="34" charset="0"/>
-                <a:ea typeface="Calibri" pitchFamily="34" charset="-122"/>
-                <a:cs typeface="Calibri" pitchFamily="34" charset="-120"/>
-              </a:rPr>
-              <a:t>By the end of their stories, each character we read about had grown in ways that surprised even themselves.</a:t>
-            </a:r>
-            <a:endParaRPr lang="en-US" sz="1800" dirty="0"/>
-          </a:p>
-        </p:txBody>
-      </p:sp>
-      <p:sp>
-        <p:nvSpPr>
-          <p:cNvPr id="11" name="Text 9"/>
-          <p:cNvSpPr/>
-          <p:nvPr/>
-        </p:nvSpPr>
-        <p:spPr>
-          <a:xfrm>
-            <a:off x="457200" y="2834640"/>
-            <a:ext cx="8046720" cy="292608"/>
-          </a:xfrm>
-          <a:prstGeom prst="rect">
-            <a:avLst/>
-          </a:prstGeom>
-          <a:noFill/>
-          <a:ln/>
-        </p:spPr>
-        <p:txBody>
-          <a:bodyPr wrap="square" lIns="0" tIns="0" rIns="0" bIns="0" rtlCol="0" anchor="ctr"/>
-          <a:lstStyle/>
-          <a:p>
-            <a:pPr indent="0" marL="0">
-              <a:buNone/>
-            </a:pPr>
-            <a:r>
-              <a:rPr lang="en-US" sz="1100" b="1" spc="200" kern="0" dirty="0">
+              <a:rPr lang="en-US" sz="1200" dirty="0">
                 <a:solidFill>
                   <a:srgbClr val="64748B"/>
                 </a:solidFill>
@@ -5423,48 +5221,9 @@
                 <a:ea typeface="Calibri" pitchFamily="34" charset="-122"/>
                 <a:cs typeface="Calibri" pitchFamily="34" charset="-120"/>
               </a:rPr>
-              <a:t>WHY</a:t>
-            </a:r>
-            <a:endParaRPr lang="en-US" sz="1100" dirty="0"/>
-          </a:p>
-        </p:txBody>
-      </p:sp>
-      <p:sp>
-        <p:nvSpPr>
-          <p:cNvPr id="12" name="Text 10"/>
-          <p:cNvSpPr/>
-          <p:nvPr/>
-        </p:nvSpPr>
-        <p:spPr>
-          <a:xfrm>
-            <a:off x="640080" y="3108960"/>
-            <a:ext cx="7863840" cy="502920"/>
-          </a:xfrm>
-          <a:prstGeom prst="rect">
-            <a:avLst/>
-          </a:prstGeom>
-          <a:noFill/>
-          <a:ln/>
-        </p:spPr>
-        <p:txBody>
-          <a:bodyPr wrap="square" lIns="0" tIns="0" rIns="0" bIns="0" rtlCol="0" anchor="ctr"/>
-          <a:lstStyle/>
-          <a:p>
-            <a:pPr indent="0" marL="0">
-              <a:buNone/>
-            </a:pPr>
-            <a:r>
-              <a:rPr lang="en-US" sz="1300" i="1" dirty="0">
-                <a:solidFill>
-                  <a:srgbClr val="64748B"/>
-                </a:solidFill>
-                <a:latin typeface="Calibri" pitchFamily="34" charset="0"/>
-                <a:ea typeface="Calibri" pitchFamily="34" charset="-122"/>
-                <a:cs typeface="Calibri" pitchFamily="34" charset="-120"/>
-              </a:rPr>
               <a:t>By the end of their stories begins the prepositional phrase used as an opener; comma after stories; had grown = past perfect verb (consistent with the past narrative); period ends.</a:t>
             </a:r>
-            <a:endParaRPr lang="en-US" sz="1300" dirty="0"/>
+            <a:endParaRPr lang="en-US" sz="1200" dirty="0"/>
           </a:p>
         </p:txBody>
       </p:sp>

--- a/Planning docs/Slides/lesson-32-3-teacher-slides.pptx
+++ b/Planning docs/Slides/lesson-32-3-teacher-slides.pptx
@@ -513,7 +513,7 @@
           <a:p>
             <a:r>
               <a:rPr lang="en-US" dirty="0"/>
-              <a:t>Lesson 32.3. Reading: Reading: Week 32.</a:t>
+              <a:t>Lesson 32.3. Reading: .</a:t>
             </a:r>
             <a:endParaRPr lang="en-US" dirty="0"/>
           </a:p>
@@ -1965,7 +1965,7 @@
                 <a:ea typeface="Calibri" pitchFamily="34" charset="-122"/>
                 <a:cs typeface="Calibri" pitchFamily="34" charset="-120"/>
               </a:rPr>
-              <a:t>Lesson 32.3  ·  Reading: Week 32</a:t>
+              <a:t>Lesson 32.3</a:t>
             </a:r>
             <a:endParaRPr lang="en-US" sz="2000" dirty="0"/>
           </a:p>
@@ -2708,121 +2708,9 @@
                 <a:ea typeface="Calibri" pitchFamily="34" charset="-122"/>
                 <a:cs typeface="Calibri" pitchFamily="34" charset="-120"/>
               </a:rPr>
-              <a:t>Reading: Week 32</a:t>
+              <a:t>Today’s chapters</a:t>
             </a:r>
             <a:endParaRPr lang="en-US" sz="2600" dirty="0"/>
-          </a:p>
-        </p:txBody>
-      </p:sp>
-      <p:sp>
-        <p:nvSpPr>
-          <p:cNvPr id="5" name="Text 3"/>
-          <p:cNvSpPr/>
-          <p:nvPr/>
-        </p:nvSpPr>
-        <p:spPr>
-          <a:xfrm>
-            <a:off x="365760" y="1463040"/>
-            <a:ext cx="8229600" cy="237744"/>
-          </a:xfrm>
-          <a:prstGeom prst="rect">
-            <a:avLst/>
-          </a:prstGeom>
-          <a:noFill/>
-          <a:ln/>
-        </p:spPr>
-        <p:txBody>
-          <a:bodyPr wrap="square" lIns="0" tIns="0" rIns="0" bIns="0" rtlCol="0" anchor="ctr"/>
-          <a:lstStyle/>
-          <a:p>
-            <a:pPr indent="0" marL="0">
-              <a:buNone/>
-            </a:pPr>
-            <a:r>
-              <a:rPr lang="en-US" sz="1100" b="1" spc="100" kern="0" dirty="0">
-                <a:solidFill>
-                  <a:srgbClr val="C7922C"/>
-                </a:solidFill>
-                <a:latin typeface="Calibri" pitchFamily="34" charset="0"/>
-                <a:ea typeface="Calibri" pitchFamily="34" charset="-122"/>
-                <a:cs typeface="Calibri" pitchFamily="34" charset="-120"/>
-              </a:rPr>
-              <a:t>PAUSE &amp; THINK</a:t>
-            </a:r>
-            <a:endParaRPr lang="en-US" sz="1100" dirty="0"/>
-          </a:p>
-        </p:txBody>
-      </p:sp>
-      <p:sp>
-        <p:nvSpPr>
-          <p:cNvPr id="6" name="Text 4"/>
-          <p:cNvSpPr/>
-          <p:nvPr/>
-        </p:nvSpPr>
-        <p:spPr>
-          <a:xfrm>
-            <a:off x="365760" y="1719072"/>
-            <a:ext cx="8412480" cy="914400"/>
-          </a:xfrm>
-          <a:prstGeom prst="rect">
-            <a:avLst/>
-          </a:prstGeom>
-          <a:noFill/>
-          <a:ln/>
-        </p:spPr>
-        <p:txBody>
-          <a:bodyPr wrap="square" lIns="0" tIns="0" rIns="0" bIns="0" rtlCol="0" anchor="ctr"/>
-          <a:lstStyle/>
-          <a:p>
-            <a:pPr indent="0" marL="0">
-              <a:buNone/>
-            </a:pPr>
-            <a:r>
-              <a:rPr lang="en-US" sz="1500" dirty="0">
-                <a:solidFill>
-                  <a:srgbClr val="1E293B"/>
-                </a:solidFill>
-                <a:latin typeface="Calibri" pitchFamily="34" charset="0"/>
-                <a:ea typeface="Calibri" pitchFamily="34" charset="-122"/>
-                <a:cs typeface="Calibri" pitchFamily="34" charset="-120"/>
-              </a:rPr>
-              <a:t>•  Reflect on how reading skills have grown.</a:t>
-            </a:r>
-            <a:endParaRPr lang="en-US" sz="1500" dirty="0"/>
-          </a:p>
-          <a:p>
-            <a:pPr indent="0" marL="0">
-              <a:buNone/>
-            </a:pPr>
-            <a:r>
-              <a:rPr lang="en-US" sz="1500" dirty="0">
-                <a:solidFill>
-                  <a:srgbClr val="1E293B"/>
-                </a:solidFill>
-                <a:latin typeface="Calibri" pitchFamily="34" charset="0"/>
-                <a:ea typeface="Calibri" pitchFamily="34" charset="-122"/>
-                <a:cs typeface="Calibri" pitchFamily="34" charset="-120"/>
-              </a:rPr>
-              <a:t>•  As you read today, ask yourself: What makes the difference between a good response and a truly memorable one?</a:t>
-            </a:r>
-            <a:endParaRPr lang="en-US" sz="1500" dirty="0"/>
-          </a:p>
-          <a:p>
-            <a:pPr indent="0" marL="0">
-              <a:buNone/>
-            </a:pPr>
-            <a:r>
-              <a:rPr lang="en-US" sz="1500" dirty="0">
-                <a:solidFill>
-                  <a:srgbClr val="1E293B"/>
-                </a:solidFill>
-                <a:latin typeface="Calibri" pitchFamily="34" charset="0"/>
-                <a:ea typeface="Calibri" pitchFamily="34" charset="-122"/>
-                <a:cs typeface="Calibri" pitchFamily="34" charset="-120"/>
-              </a:rPr>
-              <a:t>•  Re-read your opening paragraph. Does it name your character, their novel, and your claim? Revise it so all three are present and clear.</a:t>
-            </a:r>
-            <a:endParaRPr lang="en-US" sz="1500" dirty="0"/>
           </a:p>
         </p:txBody>
       </p:sp>
@@ -3931,13 +3819,13 @@
             <a:r>
               <a:rPr lang="en-US" sz="1100" b="1" spc="100" kern="0" dirty="0">
                 <a:solidFill>
-                  <a:srgbClr val="8B6FC0"/>
-                </a:solidFill>
-                <a:latin typeface="Calibri" pitchFamily="34" charset="0"/>
-                <a:ea typeface="Calibri" pitchFamily="34" charset="-122"/>
-                <a:cs typeface="Calibri" pitchFamily="34" charset="-120"/>
-              </a:rPr>
-              <a:t>READING</a:t>
+                  <a:srgbClr val="C7922C"/>
+                </a:solidFill>
+                <a:latin typeface="Calibri" pitchFamily="34" charset="0"/>
+                <a:ea typeface="Calibri" pitchFamily="34" charset="-122"/>
+                <a:cs typeface="Calibri" pitchFamily="34" charset="-120"/>
+              </a:rPr>
+              <a:t>BIG QUESTION</a:t>
             </a:r>
             <a:endParaRPr lang="en-US" sz="1100" dirty="0"/>
           </a:p>
@@ -3945,91 +3833,13 @@
       </p:sp>
       <p:sp>
         <p:nvSpPr>
-          <p:cNvPr id="5" name="Text 3"/>
+          <p:cNvPr id="5" name="Shape 3"/>
           <p:cNvSpPr/>
           <p:nvPr/>
         </p:nvSpPr>
         <p:spPr>
           <a:xfrm>
             <a:off x="365760" y="1014984"/>
-            <a:ext cx="8412480" cy="365760"/>
-          </a:xfrm>
-          <a:prstGeom prst="rect">
-            <a:avLst/>
-          </a:prstGeom>
-          <a:noFill/>
-          <a:ln/>
-        </p:spPr>
-        <p:txBody>
-          <a:bodyPr wrap="square" lIns="0" tIns="0" rIns="0" bIns="0" rtlCol="0" anchor="ctr"/>
-          <a:lstStyle/>
-          <a:p>
-            <a:pPr indent="0" marL="0">
-              <a:buNone/>
-            </a:pPr>
-            <a:r>
-              <a:rPr lang="en-US" sz="2000" b="1" dirty="0">
-                <a:solidFill>
-                  <a:srgbClr val="0E1C42"/>
-                </a:solidFill>
-                <a:latin typeface="Calibri" pitchFamily="34" charset="0"/>
-                <a:ea typeface="Calibri" pitchFamily="34" charset="-122"/>
-                <a:cs typeface="Calibri" pitchFamily="34" charset="-120"/>
-              </a:rPr>
-              <a:t>Reading: Week 32</a:t>
-            </a:r>
-            <a:endParaRPr lang="en-US" sz="2000" dirty="0"/>
-          </a:p>
-        </p:txBody>
-      </p:sp>
-      <p:sp>
-        <p:nvSpPr>
-          <p:cNvPr id="6" name="Text 4"/>
-          <p:cNvSpPr/>
-          <p:nvPr/>
-        </p:nvSpPr>
-        <p:spPr>
-          <a:xfrm>
-            <a:off x="365760" y="1508760"/>
-            <a:ext cx="8229600" cy="237744"/>
-          </a:xfrm>
-          <a:prstGeom prst="rect">
-            <a:avLst/>
-          </a:prstGeom>
-          <a:noFill/>
-          <a:ln/>
-        </p:spPr>
-        <p:txBody>
-          <a:bodyPr wrap="square" lIns="0" tIns="0" rIns="0" bIns="0" rtlCol="0" anchor="ctr"/>
-          <a:lstStyle/>
-          <a:p>
-            <a:pPr indent="0" marL="0">
-              <a:buNone/>
-            </a:pPr>
-            <a:r>
-              <a:rPr lang="en-US" sz="1100" b="1" spc="100" kern="0" dirty="0">
-                <a:solidFill>
-                  <a:srgbClr val="C7922C"/>
-                </a:solidFill>
-                <a:latin typeface="Calibri" pitchFamily="34" charset="0"/>
-                <a:ea typeface="Calibri" pitchFamily="34" charset="-122"/>
-                <a:cs typeface="Calibri" pitchFamily="34" charset="-120"/>
-              </a:rPr>
-              <a:t>BIG QUESTION</a:t>
-            </a:r>
-            <a:endParaRPr lang="en-US" sz="1100" dirty="0"/>
-          </a:p>
-        </p:txBody>
-      </p:sp>
-      <p:sp>
-        <p:nvSpPr>
-          <p:cNvPr id="7" name="Shape 5"/>
-          <p:cNvSpPr/>
-          <p:nvPr/>
-        </p:nvSpPr>
-        <p:spPr>
-          <a:xfrm>
-            <a:off x="365760" y="1746504"/>
             <a:ext cx="8412480" cy="731520"/>
           </a:xfrm>
           <a:prstGeom prst="roundRect">
@@ -4057,91 +3867,91 @@
       </p:sp>
       <p:sp>
         <p:nvSpPr>
+          <p:cNvPr id="6" name="Text 4"/>
+          <p:cNvSpPr/>
+          <p:nvPr/>
+        </p:nvSpPr>
+        <p:spPr>
+          <a:xfrm>
+            <a:off x="594360" y="1143000"/>
+            <a:ext cx="7955280" cy="475488"/>
+          </a:xfrm>
+          <a:prstGeom prst="rect">
+            <a:avLst/>
+          </a:prstGeom>
+          <a:noFill/>
+          <a:ln/>
+        </p:spPr>
+        <p:txBody>
+          <a:bodyPr wrap="square" lIns="0" tIns="0" rIns="0" bIns="0" rtlCol="0" anchor="ctr"/>
+          <a:lstStyle/>
+          <a:p>
+            <a:pPr indent="0" marL="0">
+              <a:buNone/>
+            </a:pPr>
+            <a:r>
+              <a:rPr lang="en-US" sz="1700" dirty="0">
+                <a:solidFill>
+                  <a:srgbClr val="1E293B"/>
+                </a:solidFill>
+                <a:latin typeface="Calibri" pitchFamily="34" charset="0"/>
+                <a:ea typeface="Calibri" pitchFamily="34" charset="-122"/>
+                <a:cs typeface="Calibri" pitchFamily="34" charset="-120"/>
+              </a:rPr>
+              <a:t>Reflect on how reading skills have grown.</a:t>
+            </a:r>
+            <a:endParaRPr lang="en-US" sz="1700" dirty="0"/>
+          </a:p>
+        </p:txBody>
+      </p:sp>
+      <p:sp>
+        <p:nvSpPr>
+          <p:cNvPr id="7" name="Text 5"/>
+          <p:cNvSpPr/>
+          <p:nvPr/>
+        </p:nvSpPr>
+        <p:spPr>
+          <a:xfrm>
+            <a:off x="365760" y="1874520"/>
+            <a:ext cx="8229600" cy="237744"/>
+          </a:xfrm>
+          <a:prstGeom prst="rect">
+            <a:avLst/>
+          </a:prstGeom>
+          <a:noFill/>
+          <a:ln/>
+        </p:spPr>
+        <p:txBody>
+          <a:bodyPr wrap="square" lIns="0" tIns="0" rIns="0" bIns="0" rtlCol="0" anchor="ctr"/>
+          <a:lstStyle/>
+          <a:p>
+            <a:pPr indent="0" marL="0">
+              <a:buNone/>
+            </a:pPr>
+            <a:r>
+              <a:rPr lang="en-US" sz="1100" b="1" spc="100" kern="0" dirty="0">
+                <a:solidFill>
+                  <a:srgbClr val="55C8E8"/>
+                </a:solidFill>
+                <a:latin typeface="Calibri" pitchFamily="34" charset="0"/>
+                <a:ea typeface="Calibri" pitchFamily="34" charset="-122"/>
+                <a:cs typeface="Calibri" pitchFamily="34" charset="-120"/>
+              </a:rPr>
+              <a:t>READING LENS</a:t>
+            </a:r>
+            <a:endParaRPr lang="en-US" sz="1100" dirty="0"/>
+          </a:p>
+        </p:txBody>
+      </p:sp>
+      <p:sp>
+        <p:nvSpPr>
           <p:cNvPr id="8" name="Text 6"/>
           <p:cNvSpPr/>
           <p:nvPr/>
         </p:nvSpPr>
         <p:spPr>
           <a:xfrm>
-            <a:off x="594360" y="1874520"/>
-            <a:ext cx="7955280" cy="475488"/>
-          </a:xfrm>
-          <a:prstGeom prst="rect">
-            <a:avLst/>
-          </a:prstGeom>
-          <a:noFill/>
-          <a:ln/>
-        </p:spPr>
-        <p:txBody>
-          <a:bodyPr wrap="square" lIns="0" tIns="0" rIns="0" bIns="0" rtlCol="0" anchor="ctr"/>
-          <a:lstStyle/>
-          <a:p>
-            <a:pPr indent="0" marL="0">
-              <a:buNone/>
-            </a:pPr>
-            <a:r>
-              <a:rPr lang="en-US" sz="1700" dirty="0">
-                <a:solidFill>
-                  <a:srgbClr val="1E293B"/>
-                </a:solidFill>
-                <a:latin typeface="Calibri" pitchFamily="34" charset="0"/>
-                <a:ea typeface="Calibri" pitchFamily="34" charset="-122"/>
-                <a:cs typeface="Calibri" pitchFamily="34" charset="-120"/>
-              </a:rPr>
-              <a:t>Reflect on how reading skills have grown.</a:t>
-            </a:r>
-            <a:endParaRPr lang="en-US" sz="1700" dirty="0"/>
-          </a:p>
-        </p:txBody>
-      </p:sp>
-      <p:sp>
-        <p:nvSpPr>
-          <p:cNvPr id="9" name="Text 7"/>
-          <p:cNvSpPr/>
-          <p:nvPr/>
-        </p:nvSpPr>
-        <p:spPr>
-          <a:xfrm>
-            <a:off x="365760" y="2606040"/>
-            <a:ext cx="8229600" cy="237744"/>
-          </a:xfrm>
-          <a:prstGeom prst="rect">
-            <a:avLst/>
-          </a:prstGeom>
-          <a:noFill/>
-          <a:ln/>
-        </p:spPr>
-        <p:txBody>
-          <a:bodyPr wrap="square" lIns="0" tIns="0" rIns="0" bIns="0" rtlCol="0" anchor="ctr"/>
-          <a:lstStyle/>
-          <a:p>
-            <a:pPr indent="0" marL="0">
-              <a:buNone/>
-            </a:pPr>
-            <a:r>
-              <a:rPr lang="en-US" sz="1100" b="1" spc="100" kern="0" dirty="0">
-                <a:solidFill>
-                  <a:srgbClr val="55C8E8"/>
-                </a:solidFill>
-                <a:latin typeface="Calibri" pitchFamily="34" charset="0"/>
-                <a:ea typeface="Calibri" pitchFamily="34" charset="-122"/>
-                <a:cs typeface="Calibri" pitchFamily="34" charset="-120"/>
-              </a:rPr>
-              <a:t>READING LENS</a:t>
-            </a:r>
-            <a:endParaRPr lang="en-US" sz="1100" dirty="0"/>
-          </a:p>
-        </p:txBody>
-      </p:sp>
-      <p:sp>
-        <p:nvSpPr>
-          <p:cNvPr id="10" name="Text 8"/>
-          <p:cNvSpPr/>
-          <p:nvPr/>
-        </p:nvSpPr>
-        <p:spPr>
-          <a:xfrm>
-            <a:off x="365760" y="2843784"/>
+            <a:off x="365760" y="2112264"/>
             <a:ext cx="8412480" cy="914400"/>
           </a:xfrm>
           <a:prstGeom prst="rect">
